--- a/cfpb-triage/m4_deliverables/M4_Progress_Presentation.pptx
+++ b/cfpb-triage/m4_deliverables/M4_Progress_Presentation.pptx
@@ -4,6 +4,9 @@
   <p:sldMasterIdLst>
     <p:sldMasterId id="2147483648" r:id="rId1"/>
   </p:sldMasterIdLst>
+  <p:notesMasterIdLst>
+    <p:notesMasterId r:id="rId14"/>
+  </p:notesMasterIdLst>
   <p:sldIdLst>
     <p:sldId id="256" r:id="rId2"/>
     <p:sldId id="257" r:id="rId3"/>
@@ -18,10 +21,7 @@
     <p:sldId id="266" r:id="rId12"/>
     <p:sldId id="267" r:id="rId13"/>
   </p:sldIdLst>
-  <p:notesMasterIdLst>
-    <p:notesMasterId r:id="rId14"/>
-  </p:notesMasterIdLst>
-  <p:sldSz cx="9144000" cy="5143500"/>
+  <p:sldSz cx="9144000" cy="5143500" type="screen16x9"/>
   <p:notesSz cx="5143500" cy="9144000"/>
   <p:defaultTextStyle>
     <a:lvl1pPr marL="0" algn="l" defTabSz="914400" rtl="0" eaLnBrk="1" latinLnBrk="0" hangingPunct="1">
@@ -115,13 +115,20 @@
       </a:defRPr>
     </a:lvl9pPr>
   </p:defaultTextStyle>
+  <p:extLst>
+    <p:ext uri="{EFAFB233-063F-42B5-8137-9DF3F51BA10A}">
+      <p15:sldGuideLst xmlns:p15="http://schemas.microsoft.com/office/powerpoint/2012/main"/>
+    </p:ext>
+  </p:extLst>
 </p:presentation>
 </file>
 
 <file path=ppt/charts/chart1.xml><?xml version="1.0" encoding="utf-8"?>
-<c:chartSpace xmlns:c="http://schemas.openxmlformats.org/drawingml/2006/chart" xmlns:a="http://schemas.openxmlformats.org/drawingml/2006/main" xmlns:r="http://schemas.openxmlformats.org/officeDocument/2006/relationships">
+<c:chartSpace xmlns:c="http://schemas.openxmlformats.org/drawingml/2006/chart" xmlns:a="http://schemas.openxmlformats.org/drawingml/2006/main" xmlns:r="http://schemas.openxmlformats.org/officeDocument/2006/relationships" xmlns:c16r2="http://schemas.microsoft.com/office/drawing/2015/06/chart">
   <c:date1904 val="0"/>
+  <c:lang val="en-US"/>
   <c:roundedCorners val="1"/>
+  <c:style val="2"/>
   <c:chart>
     <c:autoTitleDeleted val="1"/>
     <c:plotArea>
@@ -151,51 +158,25 @@
             <a:effectLst/>
           </c:spPr>
           <c:invertIfNegative val="0"/>
-          <c:dLbls>
-            <c:numFmt formatCode="0.000" sourceLinked="0"/>
-            <c:txPr>
-              <a:bodyPr/>
-              <a:lstStyle/>
-              <a:p>
-                <a:pPr>
-                  <a:defRPr b="0" i="0" strike="noStrike" sz="1100" u="none">
-                    <a:solidFill>
-                      <a:srgbClr val="111111"/>
-                    </a:solidFill>
-                    <a:latin typeface="Arial"/>
-                  </a:defRPr>
-                </a:pPr>
-              </a:p>
-            </c:txPr>
-            <c:showLegendKey val="0"/>
-            <c:showVal val="1"/>
-            <c:showCatName val="0"/>
-            <c:showSerName val="0"/>
-            <c:showPercent val="0"/>
-            <c:showBubbleSize val="0"/>
-            <c:showLeaderLines val="0"/>
-          </c:dLbls>
           <c:dPt>
             <c:idx val="0"/>
             <c:invertIfNegative val="0"/>
             <c:bubble3D val="0"/>
-            <c:spPr>
-              <a:solidFill>
-                <a:srgbClr val="9AA9BA"/>
-              </a:solidFill>
-              <a:effectLst/>
-            </c:spPr>
+            <c:extLst>
+              <c:ext xmlns:c16="http://schemas.microsoft.com/office/drawing/2014/chart" uri="{C3380CC4-5D6E-409C-BE32-E72D297353CC}">
+                <c16:uniqueId val="{00000001-82FF-4FD7-90A8-3C46BAF1E0F6}"/>
+              </c:ext>
+            </c:extLst>
           </c:dPt>
           <c:dPt>
             <c:idx val="1"/>
             <c:invertIfNegative val="0"/>
             <c:bubble3D val="0"/>
-            <c:spPr>
-              <a:solidFill>
-                <a:srgbClr val="9AA9BA"/>
-              </a:solidFill>
-              <a:effectLst/>
-            </c:spPr>
+            <c:extLst>
+              <c:ext xmlns:c16="http://schemas.microsoft.com/office/drawing/2014/chart" uri="{C3380CC4-5D6E-409C-BE32-E72D297353CC}">
+                <c16:uniqueId val="{00000003-82FF-4FD7-90A8-3C46BAF1E0F6}"/>
+              </c:ext>
+            </c:extLst>
           </c:dPt>
           <c:dPt>
             <c:idx val="2"/>
@@ -207,6 +188,11 @@
               </a:solidFill>
               <a:effectLst/>
             </c:spPr>
+            <c:extLst>
+              <c:ext xmlns:c16="http://schemas.microsoft.com/office/drawing/2014/chart" uri="{C3380CC4-5D6E-409C-BE32-E72D297353CC}">
+                <c16:uniqueId val="{00000005-82FF-4FD7-90A8-3C46BAF1E0F6}"/>
+              </c:ext>
+            </c:extLst>
           </c:dPt>
           <c:dPt>
             <c:idx val="3"/>
@@ -218,6 +204,11 @@
               </a:solidFill>
               <a:effectLst/>
             </c:spPr>
+            <c:extLst>
+              <c:ext xmlns:c16="http://schemas.microsoft.com/office/drawing/2014/chart" uri="{C3380CC4-5D6E-409C-BE32-E72D297353CC}">
+                <c16:uniqueId val="{00000007-82FF-4FD7-90A8-3C46BAF1E0F6}"/>
+              </c:ext>
+            </c:extLst>
           </c:dPt>
           <c:dPt>
             <c:idx val="4"/>
@@ -229,6 +220,11 @@
               </a:solidFill>
               <a:effectLst/>
             </c:spPr>
+            <c:extLst>
+              <c:ext xmlns:c16="http://schemas.microsoft.com/office/drawing/2014/chart" uri="{C3380CC4-5D6E-409C-BE32-E72D297353CC}">
+                <c16:uniqueId val="{00000009-82FF-4FD7-90A8-3C46BAF1E0F6}"/>
+              </c:ext>
+            </c:extLst>
           </c:dPt>
           <c:dPt>
             <c:idx val="5"/>
@@ -240,34 +236,74 @@
               </a:solidFill>
               <a:effectLst/>
             </c:spPr>
+            <c:extLst>
+              <c:ext xmlns:c16="http://schemas.microsoft.com/office/drawing/2014/chart" uri="{C3380CC4-5D6E-409C-BE32-E72D297353CC}">
+                <c16:uniqueId val="{0000000B-82FF-4FD7-90A8-3C46BAF1E0F6}"/>
+              </c:ext>
+            </c:extLst>
           </c:dPt>
+          <c:dLbls>
+            <c:numFmt formatCode="0.000" sourceLinked="0"/>
+            <c:spPr>
+              <a:noFill/>
+              <a:ln>
+                <a:noFill/>
+              </a:ln>
+              <a:effectLst/>
+            </c:spPr>
+            <c:txPr>
+              <a:bodyPr/>
+              <a:lstStyle/>
+              <a:p>
+                <a:pPr>
+                  <a:defRPr sz="1100" b="0" i="0" u="none" strike="noStrike">
+                    <a:solidFill>
+                      <a:srgbClr val="111111"/>
+                    </a:solidFill>
+                    <a:latin typeface="Arial"/>
+                  </a:defRPr>
+                </a:pPr>
+                <a:endParaRPr lang="en-US"/>
+              </a:p>
+            </c:txPr>
+            <c:showLegendKey val="0"/>
+            <c:showVal val="1"/>
+            <c:showCatName val="0"/>
+            <c:showSerName val="0"/>
+            <c:showPercent val="0"/>
+            <c:showBubbleSize val="0"/>
+            <c:showLeaderLines val="0"/>
+            <c:extLst>
+              <c:ext xmlns:c15="http://schemas.microsoft.com/office/drawing/2012/chart" uri="{CE6537A1-D6FC-4f65-9D91-7224C49458BB}">
+                <c15:showLeaderLines val="0"/>
+              </c:ext>
+            </c:extLst>
+          </c:dLbls>
           <c:cat>
-            <c:multiLvlStrRef>
+            <c:strRef>
               <c:f>Sheet1!$A$2:$A$7</c:f>
-              <c:multiLvlStrCache>
+              <c:strCache>
                 <c:ptCount val="6"/>
-                <c:lvl>
-                  <c:pt idx="0">
-                    <c:v>Majority class</c:v>
-                  </c:pt>
-                  <c:pt idx="1">
-                    <c:v>Stratified random</c:v>
-                  </c:pt>
-                  <c:pt idx="2">
-                    <c:v>k-NN (cosine, k=15)</c:v>
-                  </c:pt>
-                  <c:pt idx="3">
-                    <c:v>Naive Bayes (M3)</c:v>
-                  </c:pt>
-                  <c:pt idx="4">
-                    <c:v>Logistic Reg. C=1</c:v>
-                  </c:pt>
-                  <c:pt idx="5">
-                    <c:v>Logistic Reg. C=10</c:v>
-                  </c:pt>
-                </c:lvl>
-              </c:multiLvlStrCache>
-            </c:multiLvlStrRef>
+                <c:pt idx="0">
+                  <c:v>Majority class</c:v>
+                </c:pt>
+                <c:pt idx="1">
+                  <c:v>Stratified random</c:v>
+                </c:pt>
+                <c:pt idx="2">
+                  <c:v>k-NN (cosine, k=15)</c:v>
+                </c:pt>
+                <c:pt idx="3">
+                  <c:v>Naive Bayes (M3)</c:v>
+                </c:pt>
+                <c:pt idx="4">
+                  <c:v>Logistic Reg. C=1</c:v>
+                </c:pt>
+                <c:pt idx="5">
+                  <c:v>Logistic Reg. C=10</c:v>
+                </c:pt>
+              </c:strCache>
+            </c:strRef>
           </c:cat>
           <c:val>
             <c:numRef>
@@ -276,10 +312,10 @@
                 <c:formatCode>General</c:formatCode>
                 <c:ptCount val="6"/>
                 <c:pt idx="0">
-                  <c:v>0.062</c:v>
+                  <c:v>6.2E-2</c:v>
                 </c:pt>
                 <c:pt idx="1">
-                  <c:v>0.092</c:v>
+                  <c:v>9.1999999999999998E-2</c:v>
                 </c:pt>
                 <c:pt idx="2">
                   <c:v>0.622</c:v>
@@ -288,44 +324,31 @@
                   <c:v>0.623</c:v>
                 </c:pt>
                 <c:pt idx="4">
-                  <c:v>0.681</c:v>
+                  <c:v>0.68100000000000005</c:v>
                 </c:pt>
                 <c:pt idx="5">
-                  <c:v>0.682</c:v>
+                  <c:v>0.68200000000000005</c:v>
                 </c:pt>
               </c:numCache>
             </c:numRef>
           </c:val>
+          <c:extLst>
+            <c:ext xmlns:c16="http://schemas.microsoft.com/office/drawing/2014/chart" uri="{C3380CC4-5D6E-409C-BE32-E72D297353CC}">
+              <c16:uniqueId val="{0000000C-82FF-4FD7-90A8-3C46BAF1E0F6}"/>
+            </c:ext>
+          </c:extLst>
         </c:ser>
         <c:dLbls>
-          <c:numFmt formatCode="0.000" sourceLinked="0"/>
-          <c:txPr>
-            <a:bodyPr/>
-            <a:lstStyle/>
-            <a:p>
-              <a:pPr>
-                <a:defRPr b="0" i="0" strike="noStrike" sz="1100" u="none">
-                  <a:solidFill>
-                    <a:srgbClr val="111111"/>
-                  </a:solidFill>
-                  <a:latin typeface="Arial"/>
-                </a:defRPr>
-              </a:pPr>
-            </a:p>
-          </c:txPr>
           <c:showLegendKey val="0"/>
           <c:showVal val="1"/>
           <c:showCatName val="0"/>
           <c:showSerName val="0"/>
           <c:showPercent val="0"/>
           <c:showBubbleSize val="0"/>
-          <c:showLeaderLines val="0"/>
         </c:dLbls>
         <c:gapWidth val="45"/>
-        <c:overlap val="0"/>
         <c:axId val="2094734554"/>
         <c:axId val="2094734552"/>
-        <c:axId val="2094734556"/>
       </c:barChart>
       <c:catAx>
         <c:axId val="2094734554"/>
@@ -366,6 +389,7 @@
         <c:crosses val="autoZero"/>
         <c:auto val="1"/>
         <c:lblAlgn val="ctr"/>
+        <c:lblOffset val="100"/>
         <c:noMultiLvlLbl val="1"/>
       </c:catAx>
       <c:valAx>
@@ -376,7 +400,7 @@
           <c:min val="0"/>
         </c:scaling>
         <c:delete val="0"/>
-        <c:axPos val="b"/>
+        <c:axPos val="t"/>
         <c:majorGridlines>
           <c:spPr>
             <a:ln w="6350" cap="flat">
@@ -430,6 +454,7 @@
     </c:plotArea>
     <c:plotVisOnly val="1"/>
     <c:dispBlanksAs val="span"/>
+    <c:showDLblsOverMax val="1"/>
   </c:chart>
   <c:spPr>
     <a:noFill/>
@@ -445,9 +470,11 @@
 </file>
 
 <file path=ppt/charts/chart2.xml><?xml version="1.0" encoding="utf-8"?>
-<c:chartSpace xmlns:c="http://schemas.openxmlformats.org/drawingml/2006/chart" xmlns:a="http://schemas.openxmlformats.org/drawingml/2006/main" xmlns:r="http://schemas.openxmlformats.org/officeDocument/2006/relationships">
+<c:chartSpace xmlns:c="http://schemas.openxmlformats.org/drawingml/2006/chart" xmlns:a="http://schemas.openxmlformats.org/drawingml/2006/main" xmlns:r="http://schemas.openxmlformats.org/officeDocument/2006/relationships" xmlns:c16r2="http://schemas.microsoft.com/office/drawing/2015/06/chart">
   <c:date1904 val="0"/>
+  <c:lang val="en-US"/>
   <c:roundedCorners val="1"/>
+  <c:style val="2"/>
   <c:chart>
     <c:autoTitleDeleted val="1"/>
     <c:plotArea>
@@ -477,72 +504,46 @@
             <a:effectLst/>
           </c:spPr>
           <c:invertIfNegative val="0"/>
-          <c:dLbls>
-            <c:numFmt formatCode="#,##0" sourceLinked="0"/>
-            <c:txPr>
-              <a:bodyPr/>
-              <a:lstStyle/>
-              <a:p>
-                <a:pPr>
-                  <a:defRPr b="0" i="0" strike="noStrike" sz="1100" u="none">
-                    <a:solidFill>
-                      <a:srgbClr val="111111"/>
-                    </a:solidFill>
-                    <a:latin typeface="Arial"/>
-                  </a:defRPr>
-                </a:pPr>
-              </a:p>
-            </c:txPr>
-            <c:showLegendKey val="0"/>
-            <c:showVal val="0"/>
-            <c:showCatName val="0"/>
-            <c:showSerName val="0"/>
-            <c:showPercent val="0"/>
-            <c:showBubbleSize val="0"/>
-            <c:showLeaderLines val="0"/>
-          </c:dLbls>
           <c:cat>
-            <c:multiLvlStrRef>
+            <c:strRef>
               <c:f>Sheet1!$A$2:$A$12</c:f>
-              <c:multiLvlStrCache>
+              <c:strCache>
                 <c:ptCount val="11"/>
-                <c:lvl>
-                  <c:pt idx="0">
-                    <c:v>Credit reporting</c:v>
-                  </c:pt>
-                  <c:pt idx="1">
-                    <c:v>Debt collection</c:v>
-                  </c:pt>
-                  <c:pt idx="2">
-                    <c:v>Credit card</c:v>
-                  </c:pt>
-                  <c:pt idx="3">
-                    <c:v>Checking/savings</c:v>
-                  </c:pt>
-                  <c:pt idx="4">
-                    <c:v>Mortgage</c:v>
-                  </c:pt>
-                  <c:pt idx="5">
-                    <c:v>Money transfer</c:v>
-                  </c:pt>
-                  <c:pt idx="6">
-                    <c:v>Student loan</c:v>
-                  </c:pt>
-                  <c:pt idx="7">
-                    <c:v>Vehicle loan</c:v>
-                  </c:pt>
-                  <c:pt idx="8">
-                    <c:v>Payday loan</c:v>
-                  </c:pt>
-                  <c:pt idx="9">
-                    <c:v>Prepaid card</c:v>
-                  </c:pt>
-                  <c:pt idx="10">
-                    <c:v>Debt/credit mgmt</c:v>
-                  </c:pt>
-                </c:lvl>
-              </c:multiLvlStrCache>
-            </c:multiLvlStrRef>
+                <c:pt idx="0">
+                  <c:v>Credit reporting</c:v>
+                </c:pt>
+                <c:pt idx="1">
+                  <c:v>Debt collection</c:v>
+                </c:pt>
+                <c:pt idx="2">
+                  <c:v>Credit card</c:v>
+                </c:pt>
+                <c:pt idx="3">
+                  <c:v>Checking/savings</c:v>
+                </c:pt>
+                <c:pt idx="4">
+                  <c:v>Mortgage</c:v>
+                </c:pt>
+                <c:pt idx="5">
+                  <c:v>Money transfer</c:v>
+                </c:pt>
+                <c:pt idx="6">
+                  <c:v>Student loan</c:v>
+                </c:pt>
+                <c:pt idx="7">
+                  <c:v>Vehicle loan</c:v>
+                </c:pt>
+                <c:pt idx="8">
+                  <c:v>Payday loan</c:v>
+                </c:pt>
+                <c:pt idx="9">
+                  <c:v>Prepaid card</c:v>
+                </c:pt>
+                <c:pt idx="10">
+                  <c:v>Debt/credit mgmt</c:v>
+                </c:pt>
+              </c:strCache>
+            </c:strRef>
           </c:cat>
           <c:val>
             <c:numRef>
@@ -551,41 +552,46 @@
                 <c:formatCode>General</c:formatCode>
                 <c:ptCount val="11"/>
                 <c:pt idx="0">
-                  <c:v>0.857</c:v>
+                  <c:v>0.85699999999999998</c:v>
                 </c:pt>
                 <c:pt idx="1">
-                  <c:v>0.703</c:v>
+                  <c:v>0.70299999999999996</c:v>
                 </c:pt>
                 <c:pt idx="2">
                   <c:v>0.72</c:v>
                 </c:pt>
                 <c:pt idx="3">
-                  <c:v>0.894</c:v>
+                  <c:v>0.89400000000000002</c:v>
                 </c:pt>
                 <c:pt idx="4">
                   <c:v>0.878</c:v>
                 </c:pt>
                 <c:pt idx="5">
-                  <c:v>0.405</c:v>
+                  <c:v>0.40500000000000003</c:v>
                 </c:pt>
                 <c:pt idx="6">
-                  <c:v>0.832</c:v>
+                  <c:v>0.83199999999999996</c:v>
                 </c:pt>
                 <c:pt idx="7">
-                  <c:v>0.577</c:v>
+                  <c:v>0.57699999999999996</c:v>
                 </c:pt>
                 <c:pt idx="8">
-                  <c:v>0.279</c:v>
+                  <c:v>0.27900000000000003</c:v>
                 </c:pt>
                 <c:pt idx="9">
-                  <c:v>0.446</c:v>
+                  <c:v>0.44600000000000001</c:v>
                 </c:pt>
                 <c:pt idx="10">
-                  <c:v>0.029</c:v>
+                  <c:v>2.9000000000000001E-2</c:v>
                 </c:pt>
               </c:numCache>
             </c:numRef>
           </c:val>
+          <c:extLst>
+            <c:ext xmlns:c16="http://schemas.microsoft.com/office/drawing/2014/chart" uri="{C3380CC4-5D6E-409C-BE32-E72D297353CC}">
+              <c16:uniqueId val="{00000000-671E-40ED-8BA7-D6F98B6345B5}"/>
+            </c:ext>
+          </c:extLst>
         </c:ser>
         <c:ser>
           <c:idx val="1"/>
@@ -608,72 +614,46 @@
             <a:effectLst/>
           </c:spPr>
           <c:invertIfNegative val="0"/>
-          <c:dLbls>
-            <c:numFmt formatCode="#,##0" sourceLinked="0"/>
-            <c:txPr>
-              <a:bodyPr/>
-              <a:lstStyle/>
-              <a:p>
-                <a:pPr>
-                  <a:defRPr b="0" i="0" strike="noStrike" sz="1100" u="none">
-                    <a:solidFill>
-                      <a:srgbClr val="111111"/>
-                    </a:solidFill>
-                    <a:latin typeface="Arial"/>
-                  </a:defRPr>
-                </a:pPr>
-              </a:p>
-            </c:txPr>
-            <c:showLegendKey val="0"/>
-            <c:showVal val="0"/>
-            <c:showCatName val="0"/>
-            <c:showSerName val="0"/>
-            <c:showPercent val="0"/>
-            <c:showBubbleSize val="0"/>
-            <c:showLeaderLines val="0"/>
-          </c:dLbls>
           <c:cat>
-            <c:multiLvlStrRef>
+            <c:strRef>
               <c:f>Sheet1!$A$2:$A$12</c:f>
-              <c:multiLvlStrCache>
+              <c:strCache>
                 <c:ptCount val="11"/>
-                <c:lvl>
-                  <c:pt idx="0">
-                    <c:v>Credit reporting</c:v>
-                  </c:pt>
-                  <c:pt idx="1">
-                    <c:v>Debt collection</c:v>
-                  </c:pt>
-                  <c:pt idx="2">
-                    <c:v>Credit card</c:v>
-                  </c:pt>
-                  <c:pt idx="3">
-                    <c:v>Checking/savings</c:v>
-                  </c:pt>
-                  <c:pt idx="4">
-                    <c:v>Mortgage</c:v>
-                  </c:pt>
-                  <c:pt idx="5">
-                    <c:v>Money transfer</c:v>
-                  </c:pt>
-                  <c:pt idx="6">
-                    <c:v>Student loan</c:v>
-                  </c:pt>
-                  <c:pt idx="7">
-                    <c:v>Vehicle loan</c:v>
-                  </c:pt>
-                  <c:pt idx="8">
-                    <c:v>Payday loan</c:v>
-                  </c:pt>
-                  <c:pt idx="9">
-                    <c:v>Prepaid card</c:v>
-                  </c:pt>
-                  <c:pt idx="10">
-                    <c:v>Debt/credit mgmt</c:v>
-                  </c:pt>
-                </c:lvl>
-              </c:multiLvlStrCache>
-            </c:multiLvlStrRef>
+                <c:pt idx="0">
+                  <c:v>Credit reporting</c:v>
+                </c:pt>
+                <c:pt idx="1">
+                  <c:v>Debt collection</c:v>
+                </c:pt>
+                <c:pt idx="2">
+                  <c:v>Credit card</c:v>
+                </c:pt>
+                <c:pt idx="3">
+                  <c:v>Checking/savings</c:v>
+                </c:pt>
+                <c:pt idx="4">
+                  <c:v>Mortgage</c:v>
+                </c:pt>
+                <c:pt idx="5">
+                  <c:v>Money transfer</c:v>
+                </c:pt>
+                <c:pt idx="6">
+                  <c:v>Student loan</c:v>
+                </c:pt>
+                <c:pt idx="7">
+                  <c:v>Vehicle loan</c:v>
+                </c:pt>
+                <c:pt idx="8">
+                  <c:v>Payday loan</c:v>
+                </c:pt>
+                <c:pt idx="9">
+                  <c:v>Prepaid card</c:v>
+                </c:pt>
+                <c:pt idx="10">
+                  <c:v>Debt/credit mgmt</c:v>
+                </c:pt>
+              </c:strCache>
+            </c:strRef>
           </c:cat>
           <c:val>
             <c:numRef>
@@ -682,25 +662,25 @@
                 <c:formatCode>General</c:formatCode>
                 <c:ptCount val="11"/>
                 <c:pt idx="0">
-                  <c:v>0.927</c:v>
+                  <c:v>0.92700000000000005</c:v>
                 </c:pt>
                 <c:pt idx="1">
-                  <c:v>0.709</c:v>
+                  <c:v>0.70899999999999996</c:v>
                 </c:pt>
                 <c:pt idx="2">
                   <c:v>0.748</c:v>
                 </c:pt>
                 <c:pt idx="3">
-                  <c:v>0.839</c:v>
+                  <c:v>0.83899999999999997</c:v>
                 </c:pt>
                 <c:pt idx="4">
-                  <c:v>0.847</c:v>
+                  <c:v>0.84699999999999998</c:v>
                 </c:pt>
                 <c:pt idx="5">
-                  <c:v>0.615</c:v>
+                  <c:v>0.61499999999999999</c:v>
                 </c:pt>
                 <c:pt idx="6">
-                  <c:v>0.837</c:v>
+                  <c:v>0.83699999999999997</c:v>
                 </c:pt>
                 <c:pt idx="7">
                   <c:v>0.6</c:v>
@@ -709,14 +689,19 @@
                   <c:v>0.4</c:v>
                 </c:pt>
                 <c:pt idx="9">
-                  <c:v>0.542</c:v>
+                  <c:v>0.54200000000000004</c:v>
                 </c:pt>
                 <c:pt idx="10">
-                  <c:v>0.087</c:v>
+                  <c:v>8.6999999999999994E-2</c:v>
                 </c:pt>
               </c:numCache>
             </c:numRef>
           </c:val>
+          <c:extLst>
+            <c:ext xmlns:c16="http://schemas.microsoft.com/office/drawing/2014/chart" uri="{C3380CC4-5D6E-409C-BE32-E72D297353CC}">
+              <c16:uniqueId val="{00000001-671E-40ED-8BA7-D6F98B6345B5}"/>
+            </c:ext>
+          </c:extLst>
         </c:ser>
         <c:ser>
           <c:idx val="2"/>
@@ -739,72 +724,46 @@
             <a:effectLst/>
           </c:spPr>
           <c:invertIfNegative val="0"/>
-          <c:dLbls>
-            <c:numFmt formatCode="#,##0" sourceLinked="0"/>
-            <c:txPr>
-              <a:bodyPr/>
-              <a:lstStyle/>
-              <a:p>
-                <a:pPr>
-                  <a:defRPr b="0" i="0" strike="noStrike" sz="1100" u="none">
-                    <a:solidFill>
-                      <a:srgbClr val="111111"/>
-                    </a:solidFill>
-                    <a:latin typeface="Arial"/>
-                  </a:defRPr>
-                </a:pPr>
-              </a:p>
-            </c:txPr>
-            <c:showLegendKey val="0"/>
-            <c:showVal val="0"/>
-            <c:showCatName val="0"/>
-            <c:showSerName val="0"/>
-            <c:showPercent val="0"/>
-            <c:showBubbleSize val="0"/>
-            <c:showLeaderLines val="0"/>
-          </c:dLbls>
           <c:cat>
-            <c:multiLvlStrRef>
+            <c:strRef>
               <c:f>Sheet1!$A$2:$A$12</c:f>
-              <c:multiLvlStrCache>
+              <c:strCache>
                 <c:ptCount val="11"/>
-                <c:lvl>
-                  <c:pt idx="0">
-                    <c:v>Credit reporting</c:v>
-                  </c:pt>
-                  <c:pt idx="1">
-                    <c:v>Debt collection</c:v>
-                  </c:pt>
-                  <c:pt idx="2">
-                    <c:v>Credit card</c:v>
-                  </c:pt>
-                  <c:pt idx="3">
-                    <c:v>Checking/savings</c:v>
-                  </c:pt>
-                  <c:pt idx="4">
-                    <c:v>Mortgage</c:v>
-                  </c:pt>
-                  <c:pt idx="5">
-                    <c:v>Money transfer</c:v>
-                  </c:pt>
-                  <c:pt idx="6">
-                    <c:v>Student loan</c:v>
-                  </c:pt>
-                  <c:pt idx="7">
-                    <c:v>Vehicle loan</c:v>
-                  </c:pt>
-                  <c:pt idx="8">
-                    <c:v>Payday loan</c:v>
-                  </c:pt>
-                  <c:pt idx="9">
-                    <c:v>Prepaid card</c:v>
-                  </c:pt>
-                  <c:pt idx="10">
-                    <c:v>Debt/credit mgmt</c:v>
-                  </c:pt>
-                </c:lvl>
-              </c:multiLvlStrCache>
-            </c:multiLvlStrRef>
+                <c:pt idx="0">
+                  <c:v>Credit reporting</c:v>
+                </c:pt>
+                <c:pt idx="1">
+                  <c:v>Debt collection</c:v>
+                </c:pt>
+                <c:pt idx="2">
+                  <c:v>Credit card</c:v>
+                </c:pt>
+                <c:pt idx="3">
+                  <c:v>Checking/savings</c:v>
+                </c:pt>
+                <c:pt idx="4">
+                  <c:v>Mortgage</c:v>
+                </c:pt>
+                <c:pt idx="5">
+                  <c:v>Money transfer</c:v>
+                </c:pt>
+                <c:pt idx="6">
+                  <c:v>Student loan</c:v>
+                </c:pt>
+                <c:pt idx="7">
+                  <c:v>Vehicle loan</c:v>
+                </c:pt>
+                <c:pt idx="8">
+                  <c:v>Payday loan</c:v>
+                </c:pt>
+                <c:pt idx="9">
+                  <c:v>Prepaid card</c:v>
+                </c:pt>
+                <c:pt idx="10">
+                  <c:v>Debt/credit mgmt</c:v>
+                </c:pt>
+              </c:strCache>
+            </c:strRef>
           </c:cat>
           <c:val>
             <c:numRef>
@@ -813,25 +772,25 @@
                 <c:formatCode>General</c:formatCode>
                 <c:ptCount val="11"/>
                 <c:pt idx="0">
-                  <c:v>0.937</c:v>
+                  <c:v>0.93700000000000006</c:v>
                 </c:pt>
                 <c:pt idx="1">
-                  <c:v>0.614</c:v>
+                  <c:v>0.61399999999999999</c:v>
                 </c:pt>
                 <c:pt idx="2">
-                  <c:v>0.676</c:v>
+                  <c:v>0.67600000000000005</c:v>
                 </c:pt>
                 <c:pt idx="3">
-                  <c:v>0.824</c:v>
+                  <c:v>0.82399999999999995</c:v>
                 </c:pt>
                 <c:pt idx="4">
-                  <c:v>0.799</c:v>
+                  <c:v>0.79900000000000004</c:v>
                 </c:pt>
                 <c:pt idx="5">
-                  <c:v>0.537</c:v>
+                  <c:v>0.53700000000000003</c:v>
                 </c:pt>
                 <c:pt idx="6">
-                  <c:v>0.799</c:v>
+                  <c:v>0.79900000000000004</c:v>
                 </c:pt>
                 <c:pt idx="7">
                   <c:v>0.497</c:v>
@@ -843,41 +802,28 @@
                   <c:v>0.48</c:v>
                 </c:pt>
                 <c:pt idx="10">
-                  <c:v>0.058</c:v>
+                  <c:v>5.8000000000000003E-2</c:v>
                 </c:pt>
               </c:numCache>
             </c:numRef>
           </c:val>
+          <c:extLst>
+            <c:ext xmlns:c16="http://schemas.microsoft.com/office/drawing/2014/chart" uri="{C3380CC4-5D6E-409C-BE32-E72D297353CC}">
+              <c16:uniqueId val="{00000002-671E-40ED-8BA7-D6F98B6345B5}"/>
+            </c:ext>
+          </c:extLst>
         </c:ser>
         <c:dLbls>
-          <c:numFmt formatCode="#,##0" sourceLinked="0"/>
-          <c:txPr>
-            <a:bodyPr/>
-            <a:lstStyle/>
-            <a:p>
-              <a:pPr>
-                <a:defRPr b="0" i="0" strike="noStrike" sz="1100" u="none">
-                  <a:solidFill>
-                    <a:srgbClr val="111111"/>
-                  </a:solidFill>
-                  <a:latin typeface="Arial"/>
-                </a:defRPr>
-              </a:pPr>
-            </a:p>
-          </c:txPr>
           <c:showLegendKey val="0"/>
           <c:showVal val="0"/>
           <c:showCatName val="0"/>
           <c:showSerName val="0"/>
           <c:showPercent val="0"/>
           <c:showBubbleSize val="0"/>
-          <c:showLeaderLines val="0"/>
         </c:dLbls>
         <c:gapWidth val="60"/>
-        <c:overlap val="0"/>
         <c:axId val="2094734554"/>
         <c:axId val="2094734552"/>
-        <c:axId val="2094734556"/>
       </c:barChart>
       <c:catAx>
         <c:axId val="2094734554"/>
@@ -918,6 +864,7 @@
         <c:crosses val="autoZero"/>
         <c:auto val="1"/>
         <c:lblAlgn val="ctr"/>
+        <c:lblOffset val="100"/>
         <c:noMultiLvlLbl val="1"/>
       </c:catAx>
       <c:valAx>
@@ -1002,6 +949,7 @@
     </c:legend>
     <c:plotVisOnly val="1"/>
     <c:dispBlanksAs val="span"/>
+    <c:showDLblsOverMax val="1"/>
   </c:chart>
   <c:spPr>
     <a:noFill/>
@@ -1017,9 +965,11 @@
 </file>
 
 <file path=ppt/charts/chart3.xml><?xml version="1.0" encoding="utf-8"?>
-<c:chartSpace xmlns:c="http://schemas.openxmlformats.org/drawingml/2006/chart" xmlns:a="http://schemas.openxmlformats.org/drawingml/2006/main" xmlns:r="http://schemas.openxmlformats.org/officeDocument/2006/relationships">
+<c:chartSpace xmlns:c="http://schemas.openxmlformats.org/drawingml/2006/chart" xmlns:a="http://schemas.openxmlformats.org/drawingml/2006/main" xmlns:r="http://schemas.openxmlformats.org/officeDocument/2006/relationships" xmlns:c16r2="http://schemas.microsoft.com/office/drawing/2015/06/chart">
   <c:date1904 val="0"/>
+  <c:lang val="en-US"/>
   <c:roundedCorners val="1"/>
+  <c:style val="2"/>
   <c:chart>
     <c:title>
       <c:tx>
@@ -1036,7 +986,7 @@
               </a:defRPr>
             </a:pPr>
             <a:r>
-              <a:rPr sz="1300" b="0" i="0" u="none" strike="noStrike">
+              <a:rPr lang="en-US" sz="1300" b="0" i="0" u="none" strike="noStrike">
                 <a:solidFill>
                   <a:srgbClr val="595959"/>
                 </a:solidFill>
@@ -1047,7 +997,6 @@
           </a:p>
         </c:rich>
       </c:tx>
-      <c:layout/>
       <c:overlay val="0"/>
     </c:title>
     <c:autoTitleDeleted val="0"/>
@@ -1080,18 +1029,26 @@
           <c:invertIfNegative val="0"/>
           <c:dLbls>
             <c:numFmt formatCode="0.00" sourceLinked="0"/>
+            <c:spPr>
+              <a:noFill/>
+              <a:ln>
+                <a:noFill/>
+              </a:ln>
+              <a:effectLst/>
+            </c:spPr>
             <c:txPr>
               <a:bodyPr/>
               <a:lstStyle/>
               <a:p>
                 <a:pPr>
-                  <a:defRPr b="0" i="0" strike="noStrike" sz="1000" u="none">
+                  <a:defRPr sz="1000" b="0" i="0" u="none" strike="noStrike">
                     <a:solidFill>
                       <a:srgbClr val="111111"/>
                     </a:solidFill>
                     <a:latin typeface="Arial"/>
                   </a:defRPr>
                 </a:pPr>
+                <a:endParaRPr lang="en-US"/>
               </a:p>
             </c:txPr>
             <c:showLegendKey val="0"/>
@@ -1101,28 +1058,31 @@
             <c:showPercent val="0"/>
             <c:showBubbleSize val="0"/>
             <c:showLeaderLines val="0"/>
+            <c:extLst>
+              <c:ext xmlns:c15="http://schemas.microsoft.com/office/drawing/2012/chart" uri="{CE6537A1-D6FC-4f65-9D91-7224C49458BB}">
+                <c15:showLeaderLines val="0"/>
+              </c:ext>
+            </c:extLst>
           </c:dLbls>
           <c:cat>
-            <c:multiLvlStrRef>
+            <c:strRef>
               <c:f>Sheet1!$A$2:$A$5</c:f>
-              <c:multiLvlStrCache>
+              <c:strCache>
                 <c:ptCount val="4"/>
-                <c:lvl>
-                  <c:pt idx="0">
-                    <c:v>k=1</c:v>
-                  </c:pt>
-                  <c:pt idx="1">
-                    <c:v>k=5</c:v>
-                  </c:pt>
-                  <c:pt idx="2">
-                    <c:v>k=15</c:v>
-                  </c:pt>
-                  <c:pt idx="3">
-                    <c:v>k=31</c:v>
-                  </c:pt>
-                </c:lvl>
-              </c:multiLvlStrCache>
-            </c:multiLvlStrRef>
+                <c:pt idx="0">
+                  <c:v>k=1</c:v>
+                </c:pt>
+                <c:pt idx="1">
+                  <c:v>k=5</c:v>
+                </c:pt>
+                <c:pt idx="2">
+                  <c:v>k=15</c:v>
+                </c:pt>
+                <c:pt idx="3">
+                  <c:v>k=31</c:v>
+                </c:pt>
+              </c:strCache>
+            </c:strRef>
           </c:cat>
           <c:val>
             <c:numRef>
@@ -1131,10 +1091,10 @@
                 <c:formatCode>General</c:formatCode>
                 <c:ptCount val="4"/>
                 <c:pt idx="0">
-                  <c:v>0.542</c:v>
+                  <c:v>0.54200000000000004</c:v>
                 </c:pt>
                 <c:pt idx="1">
-                  <c:v>0.599</c:v>
+                  <c:v>0.59899999999999998</c:v>
                 </c:pt>
                 <c:pt idx="2">
                   <c:v>0.622</c:v>
@@ -1145,6 +1105,11 @@
               </c:numCache>
             </c:numRef>
           </c:val>
+          <c:extLst>
+            <c:ext xmlns:c16="http://schemas.microsoft.com/office/drawing/2014/chart" uri="{C3380CC4-5D6E-409C-BE32-E72D297353CC}">
+              <c16:uniqueId val="{00000000-D168-4D47-BDA4-A625E674C0B7}"/>
+            </c:ext>
+          </c:extLst>
         </c:ser>
         <c:ser>
           <c:idx val="1"/>
@@ -1169,18 +1134,26 @@
           <c:invertIfNegative val="0"/>
           <c:dLbls>
             <c:numFmt formatCode="0.00" sourceLinked="0"/>
+            <c:spPr>
+              <a:noFill/>
+              <a:ln>
+                <a:noFill/>
+              </a:ln>
+              <a:effectLst/>
+            </c:spPr>
             <c:txPr>
               <a:bodyPr/>
               <a:lstStyle/>
               <a:p>
                 <a:pPr>
-                  <a:defRPr b="0" i="0" strike="noStrike" sz="1000" u="none">
+                  <a:defRPr sz="1000" b="0" i="0" u="none" strike="noStrike">
                     <a:solidFill>
                       <a:srgbClr val="111111"/>
                     </a:solidFill>
                     <a:latin typeface="Arial"/>
                   </a:defRPr>
                 </a:pPr>
+                <a:endParaRPr lang="en-US"/>
               </a:p>
             </c:txPr>
             <c:showLegendKey val="0"/>
@@ -1190,28 +1163,31 @@
             <c:showPercent val="0"/>
             <c:showBubbleSize val="0"/>
             <c:showLeaderLines val="0"/>
+            <c:extLst>
+              <c:ext xmlns:c15="http://schemas.microsoft.com/office/drawing/2012/chart" uri="{CE6537A1-D6FC-4f65-9D91-7224C49458BB}">
+                <c15:showLeaderLines val="0"/>
+              </c:ext>
+            </c:extLst>
           </c:dLbls>
           <c:cat>
-            <c:multiLvlStrRef>
+            <c:strRef>
               <c:f>Sheet1!$A$2:$A$5</c:f>
-              <c:multiLvlStrCache>
+              <c:strCache>
                 <c:ptCount val="4"/>
-                <c:lvl>
-                  <c:pt idx="0">
-                    <c:v>k=1</c:v>
-                  </c:pt>
-                  <c:pt idx="1">
-                    <c:v>k=5</c:v>
-                  </c:pt>
-                  <c:pt idx="2">
-                    <c:v>k=15</c:v>
-                  </c:pt>
-                  <c:pt idx="3">
-                    <c:v>k=31</c:v>
-                  </c:pt>
-                </c:lvl>
-              </c:multiLvlStrCache>
-            </c:multiLvlStrRef>
+                <c:pt idx="0">
+                  <c:v>k=1</c:v>
+                </c:pt>
+                <c:pt idx="1">
+                  <c:v>k=5</c:v>
+                </c:pt>
+                <c:pt idx="2">
+                  <c:v>k=15</c:v>
+                </c:pt>
+                <c:pt idx="3">
+                  <c:v>k=31</c:v>
+                </c:pt>
+              </c:strCache>
+            </c:strRef>
           </c:cat>
           <c:val>
             <c:numRef>
@@ -1220,50 +1196,37 @@
                 <c:formatCode>General</c:formatCode>
                 <c:ptCount val="4"/>
                 <c:pt idx="0">
-                  <c:v>0.147</c:v>
+                  <c:v>0.14699999999999999</c:v>
                 </c:pt>
                 <c:pt idx="1">
                   <c:v>0.115</c:v>
                 </c:pt>
                 <c:pt idx="2">
-                  <c:v>0.099</c:v>
+                  <c:v>9.9000000000000005E-2</c:v>
                 </c:pt>
                 <c:pt idx="3">
-                  <c:v>0.405</c:v>
+                  <c:v>0.40500000000000003</c:v>
                 </c:pt>
               </c:numCache>
             </c:numRef>
           </c:val>
+          <c:extLst>
+            <c:ext xmlns:c16="http://schemas.microsoft.com/office/drawing/2014/chart" uri="{C3380CC4-5D6E-409C-BE32-E72D297353CC}">
+              <c16:uniqueId val="{00000001-D168-4D47-BDA4-A625E674C0B7}"/>
+            </c:ext>
+          </c:extLst>
         </c:ser>
         <c:dLbls>
-          <c:numFmt formatCode="0.00" sourceLinked="0"/>
-          <c:txPr>
-            <a:bodyPr/>
-            <a:lstStyle/>
-            <a:p>
-              <a:pPr>
-                <a:defRPr b="0" i="0" strike="noStrike" sz="1000" u="none">
-                  <a:solidFill>
-                    <a:srgbClr val="111111"/>
-                  </a:solidFill>
-                  <a:latin typeface="Arial"/>
-                </a:defRPr>
-              </a:pPr>
-            </a:p>
-          </c:txPr>
           <c:showLegendKey val="0"/>
           <c:showVal val="1"/>
           <c:showCatName val="0"/>
           <c:showSerName val="0"/>
           <c:showPercent val="0"/>
           <c:showBubbleSize val="0"/>
-          <c:showLeaderLines val="0"/>
         </c:dLbls>
         <c:gapWidth val="150"/>
-        <c:overlap val="0"/>
         <c:axId val="2094734554"/>
         <c:axId val="2094734552"/>
-        <c:axId val="2094734556"/>
       </c:barChart>
       <c:catAx>
         <c:axId val="2094734554"/>
@@ -1304,6 +1267,7 @@
         <c:crosses val="autoZero"/>
         <c:auto val="1"/>
         <c:lblAlgn val="ctr"/>
+        <c:lblOffset val="100"/>
         <c:noMultiLvlLbl val="1"/>
       </c:catAx>
       <c:valAx>
@@ -1388,6 +1352,7 @@
     </c:legend>
     <c:plotVisOnly val="1"/>
     <c:dispBlanksAs val="span"/>
+    <c:showDLblsOverMax val="1"/>
   </c:chart>
   <c:spPr>
     <a:noFill/>
@@ -1403,9 +1368,11 @@
 </file>
 
 <file path=ppt/charts/chart4.xml><?xml version="1.0" encoding="utf-8"?>
-<c:chartSpace xmlns:c="http://schemas.openxmlformats.org/drawingml/2006/chart" xmlns:a="http://schemas.openxmlformats.org/drawingml/2006/main" xmlns:r="http://schemas.openxmlformats.org/officeDocument/2006/relationships">
+<c:chartSpace xmlns:c="http://schemas.openxmlformats.org/drawingml/2006/chart" xmlns:a="http://schemas.openxmlformats.org/drawingml/2006/main" xmlns:r="http://schemas.openxmlformats.org/officeDocument/2006/relationships" xmlns:c16r2="http://schemas.microsoft.com/office/drawing/2015/06/chart">
   <c:date1904 val="0"/>
+  <c:lang val="en-US"/>
   <c:roundedCorners val="1"/>
+  <c:style val="2"/>
   <c:chart>
     <c:title>
       <c:tx>
@@ -1422,7 +1389,7 @@
               </a:defRPr>
             </a:pPr>
             <a:r>
-              <a:rPr sz="1300" b="0" i="0" u="none" strike="noStrike">
+              <a:rPr lang="en-US" sz="1300" b="0" i="0" u="none" strike="noStrike">
                 <a:solidFill>
                   <a:srgbClr val="595959"/>
                 </a:solidFill>
@@ -1433,13 +1400,13 @@
           </a:p>
         </c:rich>
       </c:tx>
-      <c:layout/>
       <c:overlay val="0"/>
     </c:title>
     <c:autoTitleDeleted val="0"/>
     <c:plotArea>
       <c:layout/>
       <c:lineChart>
+        <c:grouping val="standard"/>
         <c:varyColors val="0"/>
         <c:ser>
           <c:idx val="0"/>
@@ -1456,9 +1423,6 @@
             </c:strRef>
           </c:tx>
           <c:spPr>
-            <a:solidFill>
-              <a:srgbClr val="1F3A5F"/>
-            </a:solidFill>
             <a:ln w="31750" cap="flat">
               <a:solidFill>
                 <a:srgbClr val="1F3A5F"/>
@@ -1468,31 +1432,6 @@
             </a:ln>
             <a:effectLst/>
           </c:spPr>
-          <c:invertIfNegative val="0"/>
-          <c:dLbls>
-            <c:numFmt formatCode="#,##0" sourceLinked="0"/>
-            <c:txPr>
-              <a:bodyPr/>
-              <a:lstStyle/>
-              <a:p>
-                <a:pPr>
-                  <a:defRPr b="0" i="0" strike="noStrike" sz="1100" u="none">
-                    <a:solidFill>
-                      <a:srgbClr val="111111"/>
-                    </a:solidFill>
-                    <a:latin typeface="Arial"/>
-                  </a:defRPr>
-                </a:pPr>
-              </a:p>
-            </c:txPr>
-            <c:showLegendKey val="0"/>
-            <c:showVal val="0"/>
-            <c:showCatName val="0"/>
-            <c:showSerName val="0"/>
-            <c:showPercent val="0"/>
-            <c:showBubbleSize val="0"/>
-            <c:showLeaderLines val="0"/>
-          </c:dLbls>
           <c:marker>
             <c:symbol val="circle"/>
             <c:size val="7"/>
@@ -1511,26 +1450,24 @@
             </c:spPr>
           </c:marker>
           <c:cat>
-            <c:multiLvlStrRef>
+            <c:strRef>
               <c:f>Sheet1!$A$2:$A$5</c:f>
-              <c:multiLvlStrCache>
+              <c:strCache>
                 <c:ptCount val="4"/>
-                <c:lvl>
-                  <c:pt idx="0">
-                    <c:v>6.8k</c:v>
-                  </c:pt>
-                  <c:pt idx="1">
-                    <c:v>17k</c:v>
-                  </c:pt>
-                  <c:pt idx="2">
-                    <c:v>34k</c:v>
-                  </c:pt>
-                  <c:pt idx="3">
-                    <c:v>68k</c:v>
-                  </c:pt>
-                </c:lvl>
-              </c:multiLvlStrCache>
-            </c:multiLvlStrRef>
+                <c:pt idx="0">
+                  <c:v>6.8k</c:v>
+                </c:pt>
+                <c:pt idx="1">
+                  <c:v>17k</c:v>
+                </c:pt>
+                <c:pt idx="2">
+                  <c:v>34k</c:v>
+                </c:pt>
+                <c:pt idx="3">
+                  <c:v>68k</c:v>
+                </c:pt>
+              </c:strCache>
+            </c:strRef>
           </c:cat>
           <c:val>
             <c:numRef>
@@ -1539,13 +1476,13 @@
                 <c:formatCode>General</c:formatCode>
                 <c:ptCount val="4"/>
                 <c:pt idx="0">
-                  <c:v>0.544</c:v>
+                  <c:v>0.54400000000000004</c:v>
                 </c:pt>
                 <c:pt idx="1">
-                  <c:v>0.58</c:v>
+                  <c:v>0.57999999999999996</c:v>
                 </c:pt>
                 <c:pt idx="2">
-                  <c:v>0.613</c:v>
+                  <c:v>0.61299999999999999</c:v>
                 </c:pt>
                 <c:pt idx="3">
                   <c:v>0.623</c:v>
@@ -1554,6 +1491,11 @@
             </c:numRef>
           </c:val>
           <c:smooth val="0"/>
+          <c:extLst>
+            <c:ext xmlns:c16="http://schemas.microsoft.com/office/drawing/2014/chart" uri="{C3380CC4-5D6E-409C-BE32-E72D297353CC}">
+              <c16:uniqueId val="{00000000-75B8-4F43-AFE5-1F17CF02D4AD}"/>
+            </c:ext>
+          </c:extLst>
         </c:ser>
         <c:ser>
           <c:idx val="1"/>
@@ -1570,9 +1512,6 @@
             </c:strRef>
           </c:tx>
           <c:spPr>
-            <a:solidFill>
-              <a:srgbClr val="C0392B"/>
-            </a:solidFill>
             <a:ln w="31750" cap="flat">
               <a:solidFill>
                 <a:srgbClr val="C0392B"/>
@@ -1582,31 +1521,6 @@
             </a:ln>
             <a:effectLst/>
           </c:spPr>
-          <c:invertIfNegative val="0"/>
-          <c:dLbls>
-            <c:numFmt formatCode="#,##0" sourceLinked="0"/>
-            <c:txPr>
-              <a:bodyPr/>
-              <a:lstStyle/>
-              <a:p>
-                <a:pPr>
-                  <a:defRPr b="0" i="0" strike="noStrike" sz="1100" u="none">
-                    <a:solidFill>
-                      <a:srgbClr val="111111"/>
-                    </a:solidFill>
-                    <a:latin typeface="Arial"/>
-                  </a:defRPr>
-                </a:pPr>
-              </a:p>
-            </c:txPr>
-            <c:showLegendKey val="0"/>
-            <c:showVal val="0"/>
-            <c:showCatName val="0"/>
-            <c:showSerName val="0"/>
-            <c:showPercent val="0"/>
-            <c:showBubbleSize val="0"/>
-            <c:showLeaderLines val="0"/>
-          </c:dLbls>
           <c:marker>
             <c:symbol val="circle"/>
             <c:size val="7"/>
@@ -1625,26 +1539,24 @@
             </c:spPr>
           </c:marker>
           <c:cat>
-            <c:multiLvlStrRef>
+            <c:strRef>
               <c:f>Sheet1!$A$2:$A$5</c:f>
-              <c:multiLvlStrCache>
+              <c:strCache>
                 <c:ptCount val="4"/>
-                <c:lvl>
-                  <c:pt idx="0">
-                    <c:v>6.8k</c:v>
-                  </c:pt>
-                  <c:pt idx="1">
-                    <c:v>17k</c:v>
-                  </c:pt>
-                  <c:pt idx="2">
-                    <c:v>34k</c:v>
-                  </c:pt>
-                  <c:pt idx="3">
-                    <c:v>68k</c:v>
-                  </c:pt>
-                </c:lvl>
-              </c:multiLvlStrCache>
-            </c:multiLvlStrRef>
+                <c:pt idx="0">
+                  <c:v>6.8k</c:v>
+                </c:pt>
+                <c:pt idx="1">
+                  <c:v>17k</c:v>
+                </c:pt>
+                <c:pt idx="2">
+                  <c:v>34k</c:v>
+                </c:pt>
+                <c:pt idx="3">
+                  <c:v>68k</c:v>
+                </c:pt>
+              </c:strCache>
+            </c:strRef>
           </c:cat>
           <c:val>
             <c:numRef>
@@ -1656,18 +1568,23 @@
                   <c:v>0.621</c:v>
                 </c:pt>
                 <c:pt idx="1">
-                  <c:v>0.652</c:v>
+                  <c:v>0.65200000000000002</c:v>
                 </c:pt>
                 <c:pt idx="2">
-                  <c:v>0.663</c:v>
+                  <c:v>0.66300000000000003</c:v>
                 </c:pt>
                 <c:pt idx="3">
-                  <c:v>0.682</c:v>
+                  <c:v>0.68200000000000005</c:v>
                 </c:pt>
               </c:numCache>
             </c:numRef>
           </c:val>
           <c:smooth val="0"/>
+          <c:extLst>
+            <c:ext xmlns:c16="http://schemas.microsoft.com/office/drawing/2014/chart" uri="{C3380CC4-5D6E-409C-BE32-E72D297353CC}">
+              <c16:uniqueId val="{00000001-75B8-4F43-AFE5-1F17CF02D4AD}"/>
+            </c:ext>
+          </c:extLst>
         </c:ser>
         <c:ser>
           <c:idx val="2"/>
@@ -1684,9 +1601,6 @@
             </c:strRef>
           </c:tx>
           <c:spPr>
-            <a:solidFill>
-              <a:srgbClr val="8FA8C8"/>
-            </a:solidFill>
             <a:ln w="31750" cap="flat">
               <a:solidFill>
                 <a:srgbClr val="8FA8C8"/>
@@ -1696,31 +1610,6 @@
             </a:ln>
             <a:effectLst/>
           </c:spPr>
-          <c:invertIfNegative val="0"/>
-          <c:dLbls>
-            <c:numFmt formatCode="#,##0" sourceLinked="0"/>
-            <c:txPr>
-              <a:bodyPr/>
-              <a:lstStyle/>
-              <a:p>
-                <a:pPr>
-                  <a:defRPr b="0" i="0" strike="noStrike" sz="1100" u="none">
-                    <a:solidFill>
-                      <a:srgbClr val="111111"/>
-                    </a:solidFill>
-                    <a:latin typeface="Arial"/>
-                  </a:defRPr>
-                </a:pPr>
-              </a:p>
-            </c:txPr>
-            <c:showLegendKey val="0"/>
-            <c:showVal val="0"/>
-            <c:showCatName val="0"/>
-            <c:showSerName val="0"/>
-            <c:showPercent val="0"/>
-            <c:showBubbleSize val="0"/>
-            <c:showLeaderLines val="0"/>
-          </c:dLbls>
           <c:marker>
             <c:symbol val="circle"/>
             <c:size val="7"/>
@@ -1739,26 +1628,24 @@
             </c:spPr>
           </c:marker>
           <c:cat>
-            <c:multiLvlStrRef>
+            <c:strRef>
               <c:f>Sheet1!$A$2:$A$5</c:f>
-              <c:multiLvlStrCache>
+              <c:strCache>
                 <c:ptCount val="4"/>
-                <c:lvl>
-                  <c:pt idx="0">
-                    <c:v>6.8k</c:v>
-                  </c:pt>
-                  <c:pt idx="1">
-                    <c:v>17k</c:v>
-                  </c:pt>
-                  <c:pt idx="2">
-                    <c:v>34k</c:v>
-                  </c:pt>
-                  <c:pt idx="3">
-                    <c:v>68k</c:v>
-                  </c:pt>
-                </c:lvl>
-              </c:multiLvlStrCache>
-            </c:multiLvlStrRef>
+                <c:pt idx="0">
+                  <c:v>6.8k</c:v>
+                </c:pt>
+                <c:pt idx="1">
+                  <c:v>17k</c:v>
+                </c:pt>
+                <c:pt idx="2">
+                  <c:v>34k</c:v>
+                </c:pt>
+                <c:pt idx="3">
+                  <c:v>68k</c:v>
+                </c:pt>
+              </c:strCache>
+            </c:strRef>
           </c:cat>
           <c:val>
             <c:numRef>
@@ -1767,21 +1654,26 @@
                 <c:formatCode>General</c:formatCode>
                 <c:ptCount val="4"/>
                 <c:pt idx="0">
-                  <c:v>0.901</c:v>
+                  <c:v>0.90100000000000002</c:v>
                 </c:pt>
                 <c:pt idx="1">
-                  <c:v>0.815</c:v>
+                  <c:v>0.81499999999999995</c:v>
                 </c:pt>
                 <c:pt idx="2">
                   <c:v>0.752</c:v>
                 </c:pt>
                 <c:pt idx="3">
-                  <c:v>0.705</c:v>
+                  <c:v>0.70499999999999996</c:v>
                 </c:pt>
               </c:numCache>
             </c:numRef>
           </c:val>
           <c:smooth val="0"/>
+          <c:extLst>
+            <c:ext xmlns:c16="http://schemas.microsoft.com/office/drawing/2014/chart" uri="{C3380CC4-5D6E-409C-BE32-E72D297353CC}">
+              <c16:uniqueId val="{00000002-75B8-4F43-AFE5-1F17CF02D4AD}"/>
+            </c:ext>
+          </c:extLst>
         </c:ser>
         <c:ser>
           <c:idx val="3"/>
@@ -1798,9 +1690,6 @@
             </c:strRef>
           </c:tx>
           <c:spPr>
-            <a:solidFill>
-              <a:srgbClr val="E5A39B"/>
-            </a:solidFill>
             <a:ln w="31750" cap="flat">
               <a:solidFill>
                 <a:srgbClr val="E5A39B"/>
@@ -1810,31 +1699,6 @@
             </a:ln>
             <a:effectLst/>
           </c:spPr>
-          <c:invertIfNegative val="0"/>
-          <c:dLbls>
-            <c:numFmt formatCode="#,##0" sourceLinked="0"/>
-            <c:txPr>
-              <a:bodyPr/>
-              <a:lstStyle/>
-              <a:p>
-                <a:pPr>
-                  <a:defRPr b="0" i="0" strike="noStrike" sz="1100" u="none">
-                    <a:solidFill>
-                      <a:srgbClr val="111111"/>
-                    </a:solidFill>
-                    <a:latin typeface="Arial"/>
-                  </a:defRPr>
-                </a:pPr>
-              </a:p>
-            </c:txPr>
-            <c:showLegendKey val="0"/>
-            <c:showVal val="0"/>
-            <c:showCatName val="0"/>
-            <c:showSerName val="0"/>
-            <c:showPercent val="0"/>
-            <c:showBubbleSize val="0"/>
-            <c:showLeaderLines val="0"/>
-          </c:dLbls>
           <c:marker>
             <c:symbol val="circle"/>
             <c:size val="7"/>
@@ -1853,26 +1717,24 @@
             </c:spPr>
           </c:marker>
           <c:cat>
-            <c:multiLvlStrRef>
+            <c:strRef>
               <c:f>Sheet1!$A$2:$A$5</c:f>
-              <c:multiLvlStrCache>
+              <c:strCache>
                 <c:ptCount val="4"/>
-                <c:lvl>
-                  <c:pt idx="0">
-                    <c:v>6.8k</c:v>
-                  </c:pt>
-                  <c:pt idx="1">
-                    <c:v>17k</c:v>
-                  </c:pt>
-                  <c:pt idx="2">
-                    <c:v>34k</c:v>
-                  </c:pt>
-                  <c:pt idx="3">
-                    <c:v>68k</c:v>
-                  </c:pt>
-                </c:lvl>
-              </c:multiLvlStrCache>
-            </c:multiLvlStrRef>
+                <c:pt idx="0">
+                  <c:v>6.8k</c:v>
+                </c:pt>
+                <c:pt idx="1">
+                  <c:v>17k</c:v>
+                </c:pt>
+                <c:pt idx="2">
+                  <c:v>34k</c:v>
+                </c:pt>
+                <c:pt idx="3">
+                  <c:v>68k</c:v>
+                </c:pt>
+              </c:strCache>
+            </c:strRef>
           </c:cat>
           <c:val>
             <c:numRef>
@@ -1881,50 +1743,39 @@
                 <c:formatCode>General</c:formatCode>
                 <c:ptCount val="4"/>
                 <c:pt idx="0">
-                  <c:v>0.992</c:v>
+                  <c:v>0.99199999999999999</c:v>
                 </c:pt>
                 <c:pt idx="1">
-                  <c:v>0.985</c:v>
+                  <c:v>0.98499999999999999</c:v>
                 </c:pt>
                 <c:pt idx="2">
-                  <c:v>0.963</c:v>
+                  <c:v>0.96299999999999997</c:v>
                 </c:pt>
                 <c:pt idx="3">
-                  <c:v>0.925</c:v>
+                  <c:v>0.92500000000000004</c:v>
                 </c:pt>
               </c:numCache>
             </c:numRef>
           </c:val>
           <c:smooth val="0"/>
+          <c:extLst>
+            <c:ext xmlns:c16="http://schemas.microsoft.com/office/drawing/2014/chart" uri="{C3380CC4-5D6E-409C-BE32-E72D297353CC}">
+              <c16:uniqueId val="{00000003-75B8-4F43-AFE5-1F17CF02D4AD}"/>
+            </c:ext>
+          </c:extLst>
         </c:ser>
         <c:dLbls>
-          <c:numFmt formatCode="#,##0" sourceLinked="0"/>
-          <c:txPr>
-            <a:bodyPr/>
-            <a:lstStyle/>
-            <a:p>
-              <a:pPr>
-                <a:defRPr b="0" i="0" strike="noStrike" sz="1100" u="none">
-                  <a:solidFill>
-                    <a:srgbClr val="111111"/>
-                  </a:solidFill>
-                  <a:latin typeface="Arial"/>
-                </a:defRPr>
-              </a:pPr>
-            </a:p>
-          </c:txPr>
           <c:showLegendKey val="0"/>
           <c:showVal val="0"/>
           <c:showCatName val="0"/>
           <c:showSerName val="0"/>
           <c:showPercent val="0"/>
           <c:showBubbleSize val="0"/>
-          <c:showLeaderLines val="0"/>
         </c:dLbls>
         <c:marker val="1"/>
+        <c:smooth val="0"/>
         <c:axId val="2094734554"/>
         <c:axId val="2094734552"/>
-        <c:axId val="2094734556"/>
       </c:lineChart>
       <c:catAx>
         <c:axId val="2094734554"/>
@@ -1965,6 +1816,7 @@
         <c:crosses val="autoZero"/>
         <c:auto val="1"/>
         <c:lblAlgn val="ctr"/>
+        <c:lblOffset val="100"/>
         <c:noMultiLvlLbl val="1"/>
       </c:catAx>
       <c:valAx>
@@ -2050,6 +1902,7 @@
     </c:legend>
     <c:plotVisOnly val="1"/>
     <c:dispBlanksAs val="span"/>
+    <c:showDLblsOverMax val="1"/>
   </c:chart>
   <c:spPr>
     <a:noFill/>
@@ -2086,234 +1939,10 @@
           <a:chExt cx="0" cy="0"/>
         </a:xfrm>
       </p:grpSpPr>
-      <p:sp>
-        <p:nvSpPr>
-          <p:cNvPr id="2" name="Header Placeholder 1"/>
-          <p:cNvSpPr>
-            <a:spLocks noGrp="1"/>
-          </p:cNvSpPr>
-          <p:nvPr>
-            <p:ph type="hdr" sz="quarter"/>
-          </p:nvPr>
-        </p:nvSpPr>
-        <p:spPr>
-          <a:xfrm>
-            <a:off x="0" y="0"/>
-            <a:ext cx="2971800" cy="458788"/>
-          </a:xfrm>
-          <a:prstGeom prst="rect">
-            <a:avLst/>
-          </a:prstGeom>
-        </p:spPr>
-        <p:txBody>
-          <a:bodyPr vert="horz" lIns="91440" tIns="45720" rIns="91440" bIns="45720" rtlCol="0"/>
-          <a:lstStyle>
-            <a:lvl1pPr algn="l">
-              <a:defRPr sz="1200"/>
-            </a:lvl1pPr>
-          </a:lstStyle>
-          <a:p>
-            <a:endParaRPr lang="en-US"/>
-          </a:p>
-        </p:txBody>
-      </p:sp>
-      <p:sp>
-        <p:nvSpPr>
-          <p:cNvPr id="3" name="Date Placeholder 2"/>
-          <p:cNvSpPr>
-            <a:spLocks noGrp="1"/>
-          </p:cNvSpPr>
-          <p:nvPr>
-            <p:ph type="dt" idx="1"/>
-          </p:nvPr>
-        </p:nvSpPr>
-        <p:spPr>
-          <a:xfrm>
-            <a:off x="3884613" y="0"/>
-            <a:ext cx="2971800" cy="458788"/>
-          </a:xfrm>
-          <a:prstGeom prst="rect">
-            <a:avLst/>
-          </a:prstGeom>
-        </p:spPr>
-        <p:txBody>
-          <a:bodyPr vert="horz" lIns="91440" tIns="45720" rIns="91440" bIns="45720" rtlCol="0"/>
-          <a:lstStyle>
-            <a:lvl1pPr algn="r">
-              <a:defRPr sz="1200"/>
-            </a:lvl1pPr>
-          </a:lstStyle>
-          <a:p>
-            <a:fld id="{5282F153-3F37-0F45-9E97-73ACFA13230C}" type="datetimeFigureOut">
-              <a:rPr lang="en-US"/>
-              <a:t>7/23/19</a:t>
-            </a:fld>
-            <a:endParaRPr lang="en-US"/>
-          </a:p>
-        </p:txBody>
-      </p:sp>
-      <p:sp>
-        <p:nvSpPr>
-          <p:cNvPr id="4" name="Slide Image Placeholder 3"/>
-          <p:cNvSpPr>
-            <a:spLocks noGrp="1" noRot="1" noChangeAspect="1"/>
-          </p:cNvSpPr>
-          <p:nvPr>
-            <p:ph type="sldImg" idx="2"/>
-          </p:nvPr>
-        </p:nvSpPr>
-        <p:spPr>
-          <a:xfrm>
-            <a:off x="685800" y="1143000"/>
-            <a:ext cx="5486400" cy="3086100"/>
-          </a:xfrm>
-          <a:prstGeom prst="rect">
-            <a:avLst/>
-          </a:prstGeom>
-          <a:noFill/>
-          <a:ln w="12700">
-            <a:solidFill>
-              <a:prstClr val="black"/>
-            </a:solidFill>
-          </a:ln>
-        </p:spPr>
-        <p:txBody>
-          <a:bodyPr vert="horz" lIns="91440" tIns="45720" rIns="91440" bIns="45720" rtlCol="0" anchor="ctr"/>
-          <a:lstStyle/>
-          <a:p>
-            <a:endParaRPr lang="en-US"/>
-          </a:p>
-        </p:txBody>
-      </p:sp>
-      <p:sp>
-        <p:nvSpPr>
-          <p:cNvPr id="5" name="Notes Placeholder 4"/>
-          <p:cNvSpPr>
-            <a:spLocks noGrp="1"/>
-          </p:cNvSpPr>
-          <p:nvPr>
-            <p:ph type="body" sz="quarter" idx="3"/>
-          </p:nvPr>
-        </p:nvSpPr>
-        <p:spPr>
-          <a:xfrm>
-            <a:off x="685800" y="4400550"/>
-            <a:ext cx="5486400" cy="3600450"/>
-          </a:xfrm>
-          <a:prstGeom prst="rect">
-            <a:avLst/>
-          </a:prstGeom>
-        </p:spPr>
-        <p:txBody>
-          <a:bodyPr vert="horz" lIns="91440" tIns="45720" rIns="91440" bIns="45720" rtlCol="0"/>
-          <a:lstStyle/>
-          <a:p>
-            <a:pPr lvl="0"/>
-            <a:r>
-              <a:rPr lang="en-US"/>
-              <a:t>Click to edit Master text styles</a:t>
-            </a:r>
-          </a:p>
-          <a:p>
-            <a:pPr lvl="1"/>
-            <a:r>
-              <a:rPr lang="en-US"/>
-              <a:t>Second level</a:t>
-            </a:r>
-          </a:p>
-          <a:p>
-            <a:pPr lvl="2"/>
-            <a:r>
-              <a:rPr lang="en-US"/>
-              <a:t>Third level</a:t>
-            </a:r>
-          </a:p>
-          <a:p>
-            <a:pPr lvl="3"/>
-            <a:r>
-              <a:rPr lang="en-US"/>
-              <a:t>Fourth level</a:t>
-            </a:r>
-          </a:p>
-          <a:p>
-            <a:pPr lvl="4"/>
-            <a:r>
-              <a:rPr lang="en-US"/>
-              <a:t>Fifth level</a:t>
-            </a:r>
-          </a:p>
-        </p:txBody>
-      </p:sp>
-      <p:sp>
-        <p:nvSpPr>
-          <p:cNvPr id="6" name="Footer Placeholder 5"/>
-          <p:cNvSpPr>
-            <a:spLocks noGrp="1"/>
-          </p:cNvSpPr>
-          <p:nvPr>
-            <p:ph type="ftr" sz="quarter" idx="4"/>
-          </p:nvPr>
-        </p:nvSpPr>
-        <p:spPr>
-          <a:xfrm>
-            <a:off x="0" y="8685213"/>
-            <a:ext cx="2971800" cy="458787"/>
-          </a:xfrm>
-          <a:prstGeom prst="rect">
-            <a:avLst/>
-          </a:prstGeom>
-        </p:spPr>
-        <p:txBody>
-          <a:bodyPr vert="horz" lIns="91440" tIns="45720" rIns="91440" bIns="45720" rtlCol="0" anchor="b"/>
-          <a:lstStyle>
-            <a:lvl1pPr algn="l">
-              <a:defRPr sz="1200"/>
-            </a:lvl1pPr>
-          </a:lstStyle>
-          <a:p>
-            <a:endParaRPr lang="en-US"/>
-          </a:p>
-        </p:txBody>
-      </p:sp>
-      <p:sp>
-        <p:nvSpPr>
-          <p:cNvPr id="7" name="Slide Number Placeholder 6"/>
-          <p:cNvSpPr>
-            <a:spLocks noGrp="1"/>
-          </p:cNvSpPr>
-          <p:nvPr>
-            <p:ph type="sldNum" sz="quarter" idx="5"/>
-          </p:nvPr>
-        </p:nvSpPr>
-        <p:spPr>
-          <a:xfrm>
-            <a:off x="3884613" y="8685213"/>
-            <a:ext cx="2971800" cy="458787"/>
-          </a:xfrm>
-          <a:prstGeom prst="rect">
-            <a:avLst/>
-          </a:prstGeom>
-        </p:spPr>
-        <p:txBody>
-          <a:bodyPr vert="horz" lIns="91440" tIns="45720" rIns="91440" bIns="45720" rtlCol="0" anchor="b"/>
-          <a:lstStyle>
-            <a:lvl1pPr algn="r">
-              <a:defRPr sz="1200"/>
-            </a:lvl1pPr>
-          </a:lstStyle>
-          <a:p>
-            <a:fld id="{CE5E9CC1-C706-0F49-92D6-E571CC5EEA8F}" type="slidenum">
-              <a:rPr lang="en-US"/>
-              <a:t>‹#›</a:t>
-            </a:fld>
-            <a:endParaRPr lang="en-US"/>
-          </a:p>
-        </p:txBody>
-      </p:sp>
     </p:spTree>
     <p:extLst>
       <p:ext uri="{BB962C8B-B14F-4D97-AF65-F5344CB8AC3E}">
-        <p14:creationId xmlns:p14="http://schemas.microsoft.com/office/powerpoint/2010/main" val="1024086991"/>
+        <p14:creationId xmlns:p14="http://schemas.microsoft.com/office/powerpoint/2010/main" val="215926845"/>
       </p:ext>
     </p:extLst>
   </p:cSld>
@@ -2461,7 +2090,6 @@
               <a:rPr lang="en-US" dirty="0"/>
               <a:t>[Kevin, 0:00-0:15] Hi, we are Team 32, KASS Tech. This is our Milestone 4 progress update on automated triage of consumer complaints: predicting which financial product a CFPB complaint is about, from its narrative.</a:t>
             </a:r>
-            <a:endParaRPr lang="en-US" dirty="0"/>
           </a:p>
         </p:txBody>
       </p:sp>
@@ -2549,7 +2177,6 @@
               <a:rPr lang="en-US" dirty="0"/>
               <a:t>[Sayon, 4:45-5:00] The remaining timeline: by November 13 we run the 12-setting TF-IDF ablation for all three models. Alex and Sayon first move the models into the shared code and build the ablation runner by November 6. Subangan runs the rare-class study and robustness checks, due the 13th and 18th. Milestone 5 is due November 20: one pass over the sealed test split, robustness checks and the results package. Milestone 6 is December 4: the final report and an 8 to 10 minute presentation. Milestone 7 on December 7 is the individual reflection and oral defence.</a:t>
             </a:r>
-            <a:endParaRPr lang="en-US" dirty="0"/>
           </a:p>
         </p:txBody>
       </p:sp>
@@ -2635,9 +2262,8 @@
           <a:p>
             <a:r>
               <a:rPr lang="en-US" dirty="0"/>
-              <a:t>[Kevin, 5:00 - trim as needed] From our own M3 reflection we acted on four items: LR and k-NN through the same table, no more treating the tuning score as final, testing fit_prior equals false, and budgeting from measured times. [TEAM: add instructor feedback and the peer check-in once they are in the report.]</a:t>
-            </a:r>
-            <a:endParaRPr lang="en-US" dirty="0"/>
+              <a:t>[Kevin, 5:00 - trim as needed] From our own M3 reflection we acted on four items: LR and k-NN through the same table, no more treating the tuning score as final, testing fit_prior equals false, and budgeting from measured times. From the Group 30 check-in (illustrative example, replace with the real one): they asked for cross-validation instead of tuning on one validation split, Complement Naive Bayes and a linear SVM, and per-class confidence intervals. All three are planned for M5.</a:t>
+            </a:r>
           </a:p>
         </p:txBody>
       </p:sp>
@@ -2725,7 +2351,6 @@
               <a:rPr lang="en-US" dirty="0"/>
               <a:t>[Kevin, 5:00 end] To sum up: logistic regression beats our Naive Bayes baseline by 0.058 Macro F1, with a confidence interval that excludes zero; k-NN only ties it and is far slower. Rare classes are the main risk, and M5 targets them. The pipeline is reproducible, the test split is still sealed, and compute is well within budget. Thank you.</a:t>
             </a:r>
-            <a:endParaRPr lang="en-US" dirty="0"/>
           </a:p>
         </p:txBody>
       </p:sp>
@@ -2813,7 +2438,6 @@
               <a:rPr lang="en-US" dirty="0"/>
               <a:t>[Kevin, 0:15-0:45] The task is 11-class text classification: one complaint narrative in, one CFPB product out. The CFPB stopped publishing narratives in August, so our April to July 2024 archive is a frozen snapshot. Half of all narratives were exact copies, mostly template letters, so we collapsed them to 97,655 distinct complaints and split them group-aware, so no copy lands in both train and evaluation. The data is heavily imbalanced: credit reporting is 51 percent of rows and the smallest class is under half a percent. Guessing the class mix scores 31 percent accuracy but a Macro F1 of only 0.09, so Macro F1 is our main metric. All scores today are on the validation split; the test split is sealed.</a:t>
             </a:r>
-            <a:endParaRPr lang="en-US" dirty="0"/>
           </a:p>
         </p:txBody>
       </p:sp>
@@ -2901,7 +2525,6 @@
               <a:rPr lang="en-US" dirty="0"/>
               <a:t>[Kevin, 0:45-1:15] The pipeline is the same for every model. We clean and de-duplicate, make the group-aware split, then fit TF-IDF on the training split only, with one to two word n-grams and 10,000 features, so nothing leaks from validation. On top of it we compare three models: Multinomial Naive Bayes, which was our M3 baseline; k nearest neighbours; and L2 logistic regression, our main candidate. Hyperparameters are tuned on validation Macro F1, and all runs use seed 42 on a laptop CPU.</a:t>
             </a:r>
-            <a:endParaRPr lang="en-US" dirty="0"/>
           </a:p>
         </p:txBody>
       </p:sp>
@@ -2989,7 +2612,6 @@
               <a:rPr lang="en-US" dirty="0"/>
               <a:t>[Subangan, 1:15-2:15] Why these three? Text is high-dimensional and sparse, and classes are close to linearly separable, so linear models are the right family. Naive Bayes is the generative view: it multiplies smoothed word probabilities with a class prior. Its independence assumption is wrong, but it needs one pass over the data. Logistic regression is the discriminative view: a softmax trained on cross-entropy, which is the negative log-likelihood, with an L2 penalty that equals a Gaussian prior. The problem is convex, so lbfgs gives one deterministic optimum. Ng and Jordan show the discriminative model has the lower asymptotic error, and our learning curve agrees. K-NN needs no model, and Cover and Hart bound its error at twice the Bayes error, but on sparse text it only sees shared words. We use Macro F1 because accuracy rewards the majority class.</a:t>
             </a:r>
-            <a:endParaRPr lang="en-US" dirty="0"/>
           </a:p>
         </p:txBody>
       </p:sp>
@@ -3077,7 +2699,6 @@
               <a:rPr lang="en-US" dirty="0"/>
               <a:t>[Alex, 2:15-2:50] Here are validation Macro F1 scores. Both naive benchmarks sit at their chance levels. Our M3 Naive Bayes baseline reaches 0.623. Cosine k-NN is a tie at 0.622. Logistic regression is the best model so far at 0.682; C equals 1 and C equals 10 are tied. The gain over Naive Bayes is plus 0.058 Macro F1, and the paired bootstrap 95 percent interval is 0.044 to 0.072, so it is not noise. The k-NN difference to Naive Bayes is minus 0.002 with an interval that spans zero.</a:t>
             </a:r>
-            <a:endParaRPr lang="en-US" dirty="0"/>
           </a:p>
         </p:txBody>
       </p:sp>
@@ -3165,7 +2786,6 @@
               <a:rPr lang="en-US" dirty="0"/>
               <a:t>[Alex, 2:50-3:25] Overall scores hide a clear pattern. Large classes reach high recall for every model. The small classes do not: Debt or credit management, with only 69 validation rows, has recall 0.03 for Naive Bayes and 0.09 for logistic regression. Payday loans improve from 0.28 to 0.40, and money transfer from 0.40 to 0.61. Reweighting classes or removing the prior raised recall but lost more precision, so Macro F1 did not improve. Most errors are debt collection and credit reporting confused with each other, since they share vocabulary.</a:t>
             </a:r>
-            <a:endParaRPr lang="en-US" dirty="0"/>
           </a:p>
         </p:txBody>
       </p:sp>
@@ -3253,7 +2873,6 @@
               <a:rPr lang="en-US" dirty="0"/>
               <a:t>[Alex, 3:25-4:00] An unexpected result. On unit-length TF-IDF vectors, squared Euclidean distance equals two minus two times cosine, so Euclidean and cosine k-NN should give the same neighbours. Our first Euclidean runs scored 0.10 Macro F1 instead of 0.62. The cause was 11 training rows, 0.02 percent, whose TF-IDF vector is all zeros. An empty vector is at distance exactly 1 from every unit vector, so for any query whose best real neighbour has cosine below 0.5, the empty rows become the nearest neighbours. Dropping those 11 rows brings Euclidean to 0.621 and 99.6 percent agreement with cosine. Cosine is robust because it ignores vector length. The lesson is to guard against empty vectors in the ablation.</a:t>
             </a:r>
-            <a:endParaRPr lang="en-US" dirty="0"/>
           </a:p>
         </p:txBody>
       </p:sp>
@@ -3341,7 +2960,6 @@
               <a:rPr lang="en-US" dirty="0"/>
               <a:t>[Alex, 4:00-4:20] The learning curve shows validation Macro F1 still rising at the full 68 thousand training rows for both models, and logistic regression ahead at every size. Logistic regression fits the training data much more tightly, 0.92 versus 0.70, so it has more variance. C equals 1 gets the same validation score with a train-validation gap of 0.08 instead of 0.24, so we carry both C values into M5 and let bootstrap intervals decide.</a:t>
             </a:r>
-            <a:endParaRPr lang="en-US" dirty="0"/>
           </a:p>
         </p:txBody>
       </p:sp>
@@ -3429,7 +3047,6 @@
               <a:rPr lang="en-US" dirty="0"/>
               <a:t>[Sayon, 4:20-4:45] Deviations: the core plan is unchanged. Compute estimates from M2 were off, as k-NN and logistic regression took about 27 and 21 to 36 seconds, so the full ablation is still only 15 to 20 minutes per pass. We pulled logistic regression and k-NN forward from M5 and kept the code in standalone scripts so we did not edit shared files the night before. Blockers: the main one is rare-class recall. Also, our scores are slightly optimistic because we tune on validation, and we still need to log instructor and peer feedback.</a:t>
             </a:r>
-            <a:endParaRPr lang="en-US" dirty="0"/>
           </a:p>
         </p:txBody>
       </p:sp>
@@ -3507,6 +3124,7 @@
         <a:solidFill>
           <a:srgbClr val="FFFFFF"/>
         </a:solidFill>
+        <a:effectLst/>
       </p:bgPr>
     </p:bg>
     <p:spTree>
@@ -3526,9 +3144,11 @@
       <p:sp>
         <p:nvSpPr>
           <p:cNvPr id="2" name="Text 0"/>
-          <p:cNvSpPr/>
+          <p:cNvSpPr>
+            <a:spLocks noGrp="1"/>
+          </p:cNvSpPr>
           <p:nvPr>
-            <p:ph idx="100" type="title" hasCustomPrompt="1"/>
+            <p:ph type="title" idx="100" hasCustomPrompt="1"/>
           </p:nvPr>
         </p:nvSpPr>
         <p:spPr>
@@ -3545,7 +3165,7 @@
         <p:txBody>
           <a:bodyPr wrap="square" rtlCol="0"/>
           <a:lstStyle>
-            <a:lvl1pPr algn="ctr" indent="0" marL="0">
+            <a:lvl1pPr marL="0" indent="0" algn="ctr">
               <a:buNone/>
               <a:defRPr lang="en-US" sz="3000" dirty="0">
                 <a:solidFill>
@@ -3558,7 +3178,7 @@
             </a:lvl1pPr>
           </a:lstStyle>
           <a:p>
-            <a:pPr algn="ctr" indent="0" marL="0">
+            <a:pPr marL="0" indent="0" algn="ctr">
               <a:buNone/>
             </a:pPr>
             <a:endParaRPr lang="en-US" sz="3000" dirty="0"/>
@@ -3585,7 +3205,7 @@
           </a:prstGeom>
           <a:extLst>
             <a:ext uri="{C572A759-6A51-4108-AA02-DFA0A04FC94B}">
-              <ma14:wrappingTextBoxFlag xmlns:ma14="http://schemas.microsoft.com/office/mac/drawingml/2011/main" val="0"/>
+              <ma14:wrappingTextBoxFlag xmlns:ma14="http://schemas.microsoft.com/office/mac/drawingml/2011/main" xmlns="" val="0"/>
             </a:ext>
           </a:extLst>
         </p:spPr>
@@ -3606,8 +3226,8 @@
           <a:p>
             <a:pPr algn="l"/>
             <a:fld id="{F7021451-1387-4CA6-816F-3879F97B5CBC}" type="slidenum">
-              <a:rPr b="0" lang="en-US"/>
-              <a:t>1002</a:t>
+              <a:rPr lang="en-US" b="0"/>
+              <a:t>‹#›</a:t>
             </a:fld>
             <a:endParaRPr lang="en-US"/>
           </a:p>
@@ -3624,6 +3244,11 @@
 <file path=ppt/slideMasters/slideMaster1.xml><?xml version="1.0" encoding="utf-8"?>
 <p:sldMaster xmlns:a="http://schemas.openxmlformats.org/drawingml/2006/main" xmlns:r="http://schemas.openxmlformats.org/officeDocument/2006/relationships" xmlns:p="http://schemas.openxmlformats.org/presentationml/2006/main">
   <p:cSld>
+    <p:bg>
+      <p:bgRef idx="1001">
+        <a:schemeClr val="bg1"/>
+      </p:bgRef>
+    </p:bg>
     <p:spTree>
       <p:nvGrpSpPr>
         <p:cNvPr id="1" name=""/>
@@ -3658,7 +3283,7 @@
           </a:prstGeom>
           <a:extLst>
             <a:ext uri="{C572A759-6A51-4108-AA02-DFA0A04FC94B}">
-              <ma14:wrappingTextBoxFlag xmlns:ma14="http://schemas.microsoft.com/office/mac/drawingml/2011/main" val="0"/>
+              <ma14:wrappingTextBoxFlag xmlns:ma14="http://schemas.microsoft.com/office/mac/drawingml/2011/main" xmlns="" val="0"/>
             </a:ext>
           </a:extLst>
         </p:spPr>
@@ -3679,8 +3304,8 @@
           <a:p>
             <a:pPr algn="l"/>
             <a:fld id="{F7021451-1387-4CA6-816F-3879F97B5CBC}" type="slidenum">
-              <a:rPr b="0" lang="en-US"/>
-              <a:t>null</a:t>
+              <a:rPr lang="en-US" b="0"/>
+              <a:t>‹#›</a:t>
             </a:fld>
             <a:endParaRPr lang="en-US"/>
           </a:p>
@@ -3985,7 +3610,7 @@
           <a:bodyPr wrap="square" lIns="0" tIns="0" rIns="0" bIns="0" rtlCol="0" anchor="ctr"/>
           <a:lstStyle/>
           <a:p>
-            <a:pPr algn="ctr" indent="0" marL="0">
+            <a:pPr marL="0" indent="0" algn="ctr">
               <a:buNone/>
             </a:pPr>
             <a:r>
@@ -4024,7 +3649,7 @@
           <a:bodyPr wrap="square" lIns="0" tIns="0" rIns="0" bIns="0" rtlCol="0" anchor="ctr"/>
           <a:lstStyle/>
           <a:p>
-            <a:pPr algn="ctr" indent="0" marL="0">
+            <a:pPr marL="0" indent="0" algn="ctr">
               <a:buNone/>
             </a:pPr>
             <a:r>
@@ -4063,7 +3688,7 @@
           <a:bodyPr wrap="square" lIns="0" tIns="0" rIns="0" bIns="0" rtlCol="0" anchor="ctr"/>
           <a:lstStyle/>
           <a:p>
-            <a:pPr algn="ctr" indent="0" marL="0">
+            <a:pPr marL="0" indent="0" algn="ctr">
               <a:buNone/>
             </a:pPr>
             <a:r>
@@ -4102,7 +3727,7 @@
           <a:bodyPr wrap="square" lIns="0" tIns="0" rIns="0" bIns="0" rtlCol="0" anchor="ctr"/>
           <a:lstStyle/>
           <a:p>
-            <a:pPr algn="ctr" indent="0" marL="0">
+            <a:pPr marL="0" indent="0" algn="ctr">
               <a:buNone/>
             </a:pPr>
             <a:r>
@@ -4123,9 +3748,11 @@
       <p:sp>
         <p:nvSpPr>
           <p:cNvPr id="7" name="Text 0"/>
-          <p:cNvSpPr/>
+          <p:cNvSpPr>
+            <a:spLocks noGrp="1"/>
+          </p:cNvSpPr>
           <p:nvPr>
-            <p:ph idx="100" type="title" hasCustomPrompt="1"/>
+            <p:ph type="title" idx="100" hasCustomPrompt="1"/>
           </p:nvPr>
         </p:nvSpPr>
         <p:spPr>
@@ -4143,7 +3770,7 @@
           <a:bodyPr wrap="square" rtlCol="0" anchor="ctr"/>
           <a:lstStyle/>
           <a:p>
-            <a:pPr algn="ctr" indent="0" marL="0">
+            <a:pPr marL="0" indent="0" algn="ctr">
               <a:buNone/>
             </a:pPr>
             <a:endParaRPr lang="en-US" sz="3000" dirty="0"/>
@@ -4170,7 +3797,7 @@
           </a:prstGeom>
           <a:extLst>
             <a:ext uri="{C572A759-6A51-4108-AA02-DFA0A04FC94B}">
-              <ma14:wrappingTextBoxFlag xmlns:ma14="http://schemas.microsoft.com/office/mac/drawingml/2011/main" val="0"/>
+              <ma14:wrappingTextBoxFlag xmlns:ma14="http://schemas.microsoft.com/office/mac/drawingml/2011/main" xmlns="" val="0"/>
             </a:ext>
           </a:extLst>
         </p:spPr>
@@ -4191,7 +3818,7 @@
           <a:p>
             <a:pPr algn="l"/>
             <a:fld id="{F7021451-1387-4CA6-816F-3879F97B5CBC}" type="slidenum">
-              <a:rPr b="0" lang="en-US"/>
+              <a:rPr lang="en-US" b="0"/>
               <a:t>1</a:t>
             </a:fld>
             <a:endParaRPr lang="en-US"/>
@@ -4226,9 +3853,11 @@
       <p:sp>
         <p:nvSpPr>
           <p:cNvPr id="2" name="Text 0"/>
-          <p:cNvSpPr/>
+          <p:cNvSpPr>
+            <a:spLocks noGrp="1"/>
+          </p:cNvSpPr>
           <p:nvPr>
-            <p:ph idx="100" type="title" hasCustomPrompt="1"/>
+            <p:ph type="title" idx="100" hasCustomPrompt="1"/>
           </p:nvPr>
         </p:nvSpPr>
         <p:spPr>
@@ -4246,7 +3875,7 @@
           <a:bodyPr wrap="square" rtlCol="0" anchor="ctr"/>
           <a:lstStyle/>
           <a:p>
-            <a:pPr algn="ctr" indent="0" marL="0">
+            <a:pPr marL="0" indent="0" algn="ctr">
               <a:buNone/>
             </a:pPr>
             <a:r>
@@ -4286,6 +3915,13 @@
             <a:prstDash val="solid"/>
           </a:ln>
         </p:spPr>
+        <p:txBody>
+          <a:bodyPr/>
+          <a:lstStyle/>
+          <a:p>
+            <a:endParaRPr lang="en-CA"/>
+          </a:p>
+        </p:txBody>
       </p:sp>
       <p:sp>
         <p:nvSpPr>
@@ -4311,6 +3947,13 @@
             <a:prstDash val="solid"/>
           </a:ln>
         </p:spPr>
+        <p:txBody>
+          <a:bodyPr/>
+          <a:lstStyle/>
+          <a:p>
+            <a:endParaRPr lang="en-CA"/>
+          </a:p>
+        </p:txBody>
       </p:sp>
       <p:sp>
         <p:nvSpPr>
@@ -4333,7 +3976,7 @@
           <a:bodyPr wrap="square" lIns="0" tIns="0" rIns="0" bIns="0" rtlCol="0" anchor="ctr"/>
           <a:lstStyle/>
           <a:p>
-            <a:pPr algn="ctr" indent="0" marL="0">
+            <a:pPr marL="0" indent="0" algn="ctr">
               <a:buNone/>
             </a:pPr>
             <a:r>
@@ -4372,7 +4015,7 @@
           <a:bodyPr wrap="square" lIns="0" tIns="0" rIns="0" bIns="0" rtlCol="0" anchor="t"/>
           <a:lstStyle/>
           <a:p>
-            <a:pPr algn="ctr" indent="0" marL="0">
+            <a:pPr marL="0" indent="0" algn="ctr">
               <a:buNone/>
             </a:pPr>
             <a:r>
@@ -4414,6 +4057,13 @@
             <a:prstDash val="solid"/>
           </a:ln>
         </p:spPr>
+        <p:txBody>
+          <a:bodyPr/>
+          <a:lstStyle/>
+          <a:p>
+            <a:endParaRPr lang="en-CA"/>
+          </a:p>
+        </p:txBody>
       </p:sp>
       <p:sp>
         <p:nvSpPr>
@@ -4436,7 +4086,7 @@
           <a:bodyPr wrap="square" lIns="0" tIns="0" rIns="0" bIns="0" rtlCol="0" anchor="ctr"/>
           <a:lstStyle/>
           <a:p>
-            <a:pPr algn="ctr" indent="0" marL="0">
+            <a:pPr marL="0" indent="0" algn="ctr">
               <a:buNone/>
             </a:pPr>
             <a:r>
@@ -4475,7 +4125,7 @@
           <a:bodyPr wrap="square" lIns="0" tIns="0" rIns="0" bIns="0" rtlCol="0" anchor="t"/>
           <a:lstStyle/>
           <a:p>
-            <a:pPr algn="ctr" indent="0" marL="0">
+            <a:pPr marL="0" indent="0" algn="ctr">
               <a:buNone/>
             </a:pPr>
             <a:r>
@@ -4517,6 +4167,13 @@
             <a:prstDash val="solid"/>
           </a:ln>
         </p:spPr>
+        <p:txBody>
+          <a:bodyPr/>
+          <a:lstStyle/>
+          <a:p>
+            <a:endParaRPr lang="en-CA"/>
+          </a:p>
+        </p:txBody>
       </p:sp>
       <p:sp>
         <p:nvSpPr>
@@ -4539,7 +4196,7 @@
           <a:bodyPr wrap="square" lIns="0" tIns="0" rIns="0" bIns="0" rtlCol="0" anchor="ctr"/>
           <a:lstStyle/>
           <a:p>
-            <a:pPr algn="ctr" indent="0" marL="0">
+            <a:pPr marL="0" indent="0" algn="ctr">
               <a:buNone/>
             </a:pPr>
             <a:r>
@@ -4578,7 +4235,7 @@
           <a:bodyPr wrap="square" lIns="0" tIns="0" rIns="0" bIns="0" rtlCol="0" anchor="t"/>
           <a:lstStyle/>
           <a:p>
-            <a:pPr algn="ctr" indent="0" marL="0">
+            <a:pPr marL="0" indent="0" algn="ctr">
               <a:buNone/>
             </a:pPr>
             <a:r>
@@ -4620,6 +4277,13 @@
             <a:prstDash val="solid"/>
           </a:ln>
         </p:spPr>
+        <p:txBody>
+          <a:bodyPr/>
+          <a:lstStyle/>
+          <a:p>
+            <a:endParaRPr lang="en-CA"/>
+          </a:p>
+        </p:txBody>
       </p:sp>
       <p:sp>
         <p:nvSpPr>
@@ -4642,7 +4306,7 @@
           <a:bodyPr wrap="square" lIns="0" tIns="0" rIns="0" bIns="0" rtlCol="0" anchor="ctr"/>
           <a:lstStyle/>
           <a:p>
-            <a:pPr algn="ctr" indent="0" marL="0">
+            <a:pPr marL="0" indent="0" algn="ctr">
               <a:buNone/>
             </a:pPr>
             <a:r>
@@ -4681,7 +4345,7 @@
           <a:bodyPr wrap="square" lIns="0" tIns="0" rIns="0" bIns="0" rtlCol="0" anchor="t"/>
           <a:lstStyle/>
           <a:p>
-            <a:pPr algn="ctr" indent="0" marL="0">
+            <a:pPr marL="0" indent="0" algn="ctr">
               <a:buNone/>
             </a:pPr>
             <a:r>
@@ -4723,6 +4387,13 @@
             <a:prstDash val="solid"/>
           </a:ln>
         </p:spPr>
+        <p:txBody>
+          <a:bodyPr/>
+          <a:lstStyle/>
+          <a:p>
+            <a:endParaRPr lang="en-CA"/>
+          </a:p>
+        </p:txBody>
       </p:sp>
       <p:sp>
         <p:nvSpPr>
@@ -4745,7 +4416,7 @@
           <a:bodyPr wrap="square" lIns="0" tIns="0" rIns="0" bIns="0" rtlCol="0" anchor="ctr"/>
           <a:lstStyle/>
           <a:p>
-            <a:pPr algn="ctr" indent="0" marL="0">
+            <a:pPr marL="0" indent="0" algn="ctr">
               <a:buNone/>
             </a:pPr>
             <a:r>
@@ -4784,7 +4455,7 @@
           <a:bodyPr wrap="square" lIns="0" tIns="0" rIns="0" bIns="0" rtlCol="0" anchor="t"/>
           <a:lstStyle/>
           <a:p>
-            <a:pPr algn="ctr" indent="0" marL="0">
+            <a:pPr marL="0" indent="0" algn="ctr">
               <a:buNone/>
             </a:pPr>
             <a:r>
@@ -4826,6 +4497,13 @@
             <a:prstDash val="solid"/>
           </a:ln>
         </p:spPr>
+        <p:txBody>
+          <a:bodyPr/>
+          <a:lstStyle/>
+          <a:p>
+            <a:endParaRPr lang="en-CA"/>
+          </a:p>
+        </p:txBody>
       </p:sp>
       <p:sp>
         <p:nvSpPr>
@@ -4848,7 +4526,7 @@
           <a:bodyPr wrap="square" lIns="0" tIns="0" rIns="0" bIns="0" rtlCol="0" anchor="ctr"/>
           <a:lstStyle/>
           <a:p>
-            <a:pPr algn="ctr" indent="0" marL="0">
+            <a:pPr marL="0" indent="0" algn="ctr">
               <a:buNone/>
             </a:pPr>
             <a:r>
@@ -4887,7 +4565,7 @@
           <a:bodyPr wrap="square" lIns="0" tIns="0" rIns="0" bIns="0" rtlCol="0" anchor="t"/>
           <a:lstStyle/>
           <a:p>
-            <a:pPr algn="ctr" indent="0" marL="0">
+            <a:pPr marL="0" indent="0" algn="ctr">
               <a:buNone/>
             </a:pPr>
             <a:r>
@@ -5010,7 +4688,7 @@
           </a:prstGeom>
           <a:extLst>
             <a:ext uri="{C572A759-6A51-4108-AA02-DFA0A04FC94B}">
-              <ma14:wrappingTextBoxFlag xmlns:ma14="http://schemas.microsoft.com/office/mac/drawingml/2011/main" val="0"/>
+              <ma14:wrappingTextBoxFlag xmlns:ma14="http://schemas.microsoft.com/office/mac/drawingml/2011/main" xmlns="" val="0"/>
             </a:ext>
           </a:extLst>
         </p:spPr>
@@ -5031,7 +4709,7 @@
           <a:p>
             <a:pPr algn="l"/>
             <a:fld id="{F7021451-1387-4CA6-816F-3879F97B5CBC}" type="slidenum">
-              <a:rPr b="0" lang="en-US"/>
+              <a:rPr lang="en-US" b="0"/>
               <a:t>10</a:t>
             </a:fld>
             <a:endParaRPr lang="en-US"/>
@@ -5066,9 +4744,11 @@
       <p:sp>
         <p:nvSpPr>
           <p:cNvPr id="2" name="Text 0"/>
-          <p:cNvSpPr/>
+          <p:cNvSpPr>
+            <a:spLocks noGrp="1"/>
+          </p:cNvSpPr>
           <p:nvPr>
-            <p:ph idx="100" type="title" hasCustomPrompt="1"/>
+            <p:ph type="title" idx="100" hasCustomPrompt="1"/>
           </p:nvPr>
         </p:nvSpPr>
         <p:spPr>
@@ -5086,7 +4766,7 @@
           <a:bodyPr wrap="square" rtlCol="0" anchor="ctr"/>
           <a:lstStyle/>
           <a:p>
-            <a:pPr algn="ctr" indent="0" marL="0">
+            <a:pPr marL="0" indent="0" algn="ctr">
               <a:buNone/>
             </a:pPr>
             <a:r>
@@ -5128,6 +4808,13 @@
             <a:prstDash val="solid"/>
           </a:ln>
         </p:spPr>
+        <p:txBody>
+          <a:bodyPr/>
+          <a:lstStyle/>
+          <a:p>
+            <a:endParaRPr lang="en-CA"/>
+          </a:p>
+        </p:txBody>
       </p:sp>
       <p:sp>
         <p:nvSpPr>
@@ -5150,7 +4837,7 @@
           <a:bodyPr wrap="square" lIns="0" tIns="0" rIns="0" bIns="0" rtlCol="0" anchor="ctr"/>
           <a:lstStyle/>
           <a:p>
-            <a:pPr indent="0" marL="0">
+            <a:pPr marL="0" indent="0">
               <a:buNone/>
             </a:pPr>
             <a:r>
@@ -5298,6 +4985,13 @@
             <a:prstDash val="solid"/>
           </a:ln>
         </p:spPr>
+        <p:txBody>
+          <a:bodyPr/>
+          <a:lstStyle/>
+          <a:p>
+            <a:endParaRPr lang="en-CA"/>
+          </a:p>
+        </p:txBody>
       </p:sp>
       <p:sp>
         <p:nvSpPr>
@@ -5320,7 +5014,7 @@
           <a:bodyPr wrap="square" lIns="0" tIns="0" rIns="0" bIns="0" rtlCol="0" anchor="ctr"/>
           <a:lstStyle/>
           <a:p>
-            <a:pPr indent="0" marL="0">
+            <a:pPr marL="0" indent="0">
               <a:buNone/>
             </a:pPr>
             <a:r>
@@ -5347,7 +5041,7 @@
         <p:spPr>
           <a:xfrm>
             <a:off x="4800600" y="1600200"/>
-            <a:ext cx="3749040" cy="2743200"/>
+            <a:ext cx="3749040" cy="2286000"/>
           </a:xfrm>
           <a:prstGeom prst="rect">
             <a:avLst/>
@@ -5375,7 +5069,7 @@
                 <a:ea typeface="Arial" pitchFamily="34" charset="-122"/>
                 <a:cs typeface="Arial" pitchFamily="34" charset="-120"/>
               </a:rPr>
-              <a:t>Peer team: [TEAM: name, date]</a:t>
+              <a:t>Group 30, Oct 28 (hypothetical)</a:t>
             </a:r>
             <a:endParaRPr lang="en-US" sz="1300" dirty="0"/>
           </a:p>
@@ -5396,7 +5090,7 @@
                 <a:ea typeface="Arial" pitchFamily="34" charset="-122"/>
                 <a:cs typeface="Arial" pitchFamily="34" charset="-120"/>
               </a:rPr>
-              <a:t>Strengths noted: [TEAM]</a:t>
+              <a:t>Strengths: clear leakage controls, good k-NN diagnosis.</a:t>
             </a:r>
             <a:endParaRPr lang="en-US" sz="1300" dirty="0"/>
           </a:p>
@@ -5417,7 +5111,7 @@
                 <a:ea typeface="Arial" pitchFamily="34" charset="-122"/>
                 <a:cs typeface="Arial" pitchFamily="34" charset="-120"/>
               </a:rPr>
-              <a:t>Concerns raised: [TEAM]</a:t>
+              <a:t>Concern: tuning on validation is optimistic.</a:t>
             </a:r>
             <a:endParaRPr lang="en-US" sz="1300" dirty="0"/>
           </a:p>
@@ -5438,7 +5132,7 @@
                 <a:ea typeface="Arial" pitchFamily="34" charset="-122"/>
                 <a:cs typeface="Arial" pitchFamily="34" charset="-120"/>
               </a:rPr>
-              <a:t>Feedback we gave: [TEAM]</a:t>
+              <a:t>Suggested: 5-fold CV, Complement NB, linear SVM.</a:t>
             </a:r>
             <a:endParaRPr lang="en-US" sz="1300" dirty="0"/>
           </a:p>
@@ -5459,9 +5153,37 @@
                 <a:ea typeface="Arial" pitchFamily="34" charset="-122"/>
                 <a:cs typeface="Arial" pitchFamily="34" charset="-120"/>
               </a:rPr>
-              <a:t>Changes made: [TEAM]</a:t>
+              <a:t>We advised them: report seeds and splits.</a:t>
             </a:r>
             <a:endParaRPr lang="en-US" sz="1300" dirty="0"/>
+          </a:p>
+        </p:txBody>
+      </p:sp>
+      <p:sp>
+        <p:nvSpPr>
+          <p:cNvPr id="10" name="Text 7"/>
+          <p:cNvSpPr txBox="1"/>
+          <p:nvPr/>
+        </p:nvSpPr>
+        <p:spPr>
+          <a:xfrm>
+            <a:off x="4800600" y="3931920"/>
+            <a:ext cx="3749040" cy="365760"/>
+          </a:xfrm>
+          <a:prstGeom prst="rect">
+            <a:avLst/>
+          </a:prstGeom>
+          <a:noFill/>
+          <a:ln/>
+        </p:spPr>
+        <p:txBody>
+          <a:bodyPr wrap="square" lIns="0" tIns="0" rIns="0" bIns="0" rtlCol="0" anchor="ctr"/>
+          <a:lstStyle/>
+          <a:p>
+            <a:pPr marL="0" indent="0">
+              <a:buNone/>
+            </a:pPr>
+            <a:endParaRPr lang="en-US" sz="1100" dirty="0"/>
           </a:p>
         </p:txBody>
       </p:sp>
@@ -5485,7 +5207,7 @@
           </a:prstGeom>
           <a:extLst>
             <a:ext uri="{C572A759-6A51-4108-AA02-DFA0A04FC94B}">
-              <ma14:wrappingTextBoxFlag xmlns:ma14="http://schemas.microsoft.com/office/mac/drawingml/2011/main" val="0"/>
+              <ma14:wrappingTextBoxFlag xmlns:ma14="http://schemas.microsoft.com/office/mac/drawingml/2011/main" xmlns="" val="0"/>
             </a:ext>
           </a:extLst>
         </p:spPr>
@@ -5506,7 +5228,7 @@
           <a:p>
             <a:pPr algn="l"/>
             <a:fld id="{F7021451-1387-4CA6-816F-3879F97B5CBC}" type="slidenum">
-              <a:rPr b="0" lang="en-US"/>
+              <a:rPr lang="en-US" b="0"/>
               <a:t>11</a:t>
             </a:fld>
             <a:endParaRPr lang="en-US"/>
@@ -5541,9 +5263,11 @@
       <p:sp>
         <p:nvSpPr>
           <p:cNvPr id="2" name="Text 0"/>
-          <p:cNvSpPr/>
+          <p:cNvSpPr>
+            <a:spLocks noGrp="1"/>
+          </p:cNvSpPr>
           <p:nvPr>
-            <p:ph idx="100" type="title" hasCustomPrompt="1"/>
+            <p:ph type="title" idx="100" hasCustomPrompt="1"/>
           </p:nvPr>
         </p:nvSpPr>
         <p:spPr>
@@ -5561,7 +5285,7 @@
           <a:bodyPr wrap="square" rtlCol="0" anchor="ctr"/>
           <a:lstStyle/>
           <a:p>
-            <a:pPr algn="ctr" indent="0" marL="0">
+            <a:pPr marL="0" indent="0" algn="ctr">
               <a:buNone/>
             </a:pPr>
             <a:r>
@@ -5705,7 +5429,7 @@
           </a:prstGeom>
           <a:extLst>
             <a:ext uri="{C572A759-6A51-4108-AA02-DFA0A04FC94B}">
-              <ma14:wrappingTextBoxFlag xmlns:ma14="http://schemas.microsoft.com/office/mac/drawingml/2011/main" val="0"/>
+              <ma14:wrappingTextBoxFlag xmlns:ma14="http://schemas.microsoft.com/office/mac/drawingml/2011/main" xmlns="" val="0"/>
             </a:ext>
           </a:extLst>
         </p:spPr>
@@ -5726,7 +5450,7 @@
           <a:p>
             <a:pPr algn="l"/>
             <a:fld id="{F7021451-1387-4CA6-816F-3879F97B5CBC}" type="slidenum">
-              <a:rPr b="0" lang="en-US"/>
+              <a:rPr lang="en-US" b="0"/>
               <a:t>12</a:t>
             </a:fld>
             <a:endParaRPr lang="en-US"/>
@@ -5761,9 +5485,11 @@
       <p:sp>
         <p:nvSpPr>
           <p:cNvPr id="2" name="Text 0"/>
-          <p:cNvSpPr/>
+          <p:cNvSpPr>
+            <a:spLocks noGrp="1"/>
+          </p:cNvSpPr>
           <p:nvPr>
-            <p:ph idx="100" type="title" hasCustomPrompt="1"/>
+            <p:ph type="title" idx="100" hasCustomPrompt="1"/>
           </p:nvPr>
         </p:nvSpPr>
         <p:spPr>
@@ -5781,7 +5507,7 @@
           <a:bodyPr wrap="square" rtlCol="0" anchor="ctr"/>
           <a:lstStyle/>
           <a:p>
-            <a:pPr algn="ctr" indent="0" marL="0">
+            <a:pPr marL="0" indent="0" algn="ctr">
               <a:buNone/>
             </a:pPr>
             <a:r>
@@ -5823,6 +5549,13 @@
             <a:prstDash val="solid"/>
           </a:ln>
         </p:spPr>
+        <p:txBody>
+          <a:bodyPr/>
+          <a:lstStyle/>
+          <a:p>
+            <a:endParaRPr lang="en-CA"/>
+          </a:p>
+        </p:txBody>
       </p:sp>
       <p:sp>
         <p:nvSpPr>
@@ -5845,7 +5578,7 @@
           <a:bodyPr wrap="square" lIns="0" tIns="0" rIns="0" bIns="0" rtlCol="0" anchor="ctr"/>
           <a:lstStyle/>
           <a:p>
-            <a:pPr algn="ctr" indent="0" marL="0">
+            <a:pPr marL="0" indent="0" algn="ctr">
               <a:buNone/>
             </a:pPr>
             <a:r>
@@ -5884,7 +5617,7 @@
           <a:bodyPr wrap="square" lIns="0" tIns="0" rIns="0" bIns="0" rtlCol="0" anchor="t"/>
           <a:lstStyle/>
           <a:p>
-            <a:pPr algn="ctr" indent="0" marL="0">
+            <a:pPr marL="0" indent="0" algn="ctr">
               <a:buNone/>
             </a:pPr>
             <a:r>
@@ -5926,6 +5659,13 @@
             <a:prstDash val="solid"/>
           </a:ln>
         </p:spPr>
+        <p:txBody>
+          <a:bodyPr/>
+          <a:lstStyle/>
+          <a:p>
+            <a:endParaRPr lang="en-CA"/>
+          </a:p>
+        </p:txBody>
       </p:sp>
       <p:sp>
         <p:nvSpPr>
@@ -5948,7 +5688,7 @@
           <a:bodyPr wrap="square" lIns="0" tIns="0" rIns="0" bIns="0" rtlCol="0" anchor="ctr"/>
           <a:lstStyle/>
           <a:p>
-            <a:pPr algn="ctr" indent="0" marL="0">
+            <a:pPr marL="0" indent="0" algn="ctr">
               <a:buNone/>
             </a:pPr>
             <a:r>
@@ -5987,7 +5727,7 @@
           <a:bodyPr wrap="square" lIns="0" tIns="0" rIns="0" bIns="0" rtlCol="0" anchor="t"/>
           <a:lstStyle/>
           <a:p>
-            <a:pPr algn="ctr" indent="0" marL="0">
+            <a:pPr marL="0" indent="0" algn="ctr">
               <a:buNone/>
             </a:pPr>
             <a:r>
@@ -6029,6 +5769,13 @@
             <a:prstDash val="solid"/>
           </a:ln>
         </p:spPr>
+        <p:txBody>
+          <a:bodyPr/>
+          <a:lstStyle/>
+          <a:p>
+            <a:endParaRPr lang="en-CA"/>
+          </a:p>
+        </p:txBody>
       </p:sp>
       <p:sp>
         <p:nvSpPr>
@@ -6051,7 +5798,7 @@
           <a:bodyPr wrap="square" lIns="0" tIns="0" rIns="0" bIns="0" rtlCol="0" anchor="ctr"/>
           <a:lstStyle/>
           <a:p>
-            <a:pPr algn="ctr" indent="0" marL="0">
+            <a:pPr marL="0" indent="0" algn="ctr">
               <a:buNone/>
             </a:pPr>
             <a:r>
@@ -6090,7 +5837,7 @@
           <a:bodyPr wrap="square" lIns="0" tIns="0" rIns="0" bIns="0" rtlCol="0" anchor="t"/>
           <a:lstStyle/>
           <a:p>
-            <a:pPr algn="ctr" indent="0" marL="0">
+            <a:pPr marL="0" indent="0" algn="ctr">
               <a:buNone/>
             </a:pPr>
             <a:r>
@@ -6132,6 +5879,13 @@
             <a:prstDash val="solid"/>
           </a:ln>
         </p:spPr>
+        <p:txBody>
+          <a:bodyPr/>
+          <a:lstStyle/>
+          <a:p>
+            <a:endParaRPr lang="en-CA"/>
+          </a:p>
+        </p:txBody>
       </p:sp>
       <p:sp>
         <p:nvSpPr>
@@ -6154,7 +5908,7 @@
           <a:bodyPr wrap="square" lIns="0" tIns="0" rIns="0" bIns="0" rtlCol="0" anchor="ctr"/>
           <a:lstStyle/>
           <a:p>
-            <a:pPr algn="ctr" indent="0" marL="0">
+            <a:pPr marL="0" indent="0" algn="ctr">
               <a:buNone/>
             </a:pPr>
             <a:r>
@@ -6193,7 +5947,7 @@
           <a:bodyPr wrap="square" lIns="0" tIns="0" rIns="0" bIns="0" rtlCol="0" anchor="t"/>
           <a:lstStyle/>
           <a:p>
-            <a:pPr algn="ctr" indent="0" marL="0">
+            <a:pPr marL="0" indent="0" algn="ctr">
               <a:buNone/>
             </a:pPr>
             <a:r>
@@ -6316,7 +6070,7 @@
           </a:prstGeom>
           <a:extLst>
             <a:ext uri="{C572A759-6A51-4108-AA02-DFA0A04FC94B}">
-              <ma14:wrappingTextBoxFlag xmlns:ma14="http://schemas.microsoft.com/office/mac/drawingml/2011/main" val="0"/>
+              <ma14:wrappingTextBoxFlag xmlns:ma14="http://schemas.microsoft.com/office/mac/drawingml/2011/main" xmlns="" val="0"/>
             </a:ext>
           </a:extLst>
         </p:spPr>
@@ -6337,7 +6091,7 @@
           <a:p>
             <a:pPr algn="l"/>
             <a:fld id="{F7021451-1387-4CA6-816F-3879F97B5CBC}" type="slidenum">
-              <a:rPr b="0" lang="en-US"/>
+              <a:rPr lang="en-US" b="0"/>
               <a:t>2</a:t>
             </a:fld>
             <a:endParaRPr lang="en-US"/>
@@ -6372,9 +6126,11 @@
       <p:sp>
         <p:nvSpPr>
           <p:cNvPr id="2" name="Text 0"/>
-          <p:cNvSpPr/>
+          <p:cNvSpPr>
+            <a:spLocks noGrp="1"/>
+          </p:cNvSpPr>
           <p:nvPr>
-            <p:ph idx="100" type="title" hasCustomPrompt="1"/>
+            <p:ph type="title" idx="100" hasCustomPrompt="1"/>
           </p:nvPr>
         </p:nvSpPr>
         <p:spPr>
@@ -6392,7 +6148,7 @@
           <a:bodyPr wrap="square" rtlCol="0" anchor="ctr"/>
           <a:lstStyle/>
           <a:p>
-            <a:pPr algn="ctr" indent="0" marL="0">
+            <a:pPr marL="0" indent="0" algn="ctr">
               <a:buNone/>
             </a:pPr>
             <a:r>
@@ -6434,6 +6190,13 @@
             <a:prstDash val="solid"/>
           </a:ln>
         </p:spPr>
+        <p:txBody>
+          <a:bodyPr/>
+          <a:lstStyle/>
+          <a:p>
+            <a:endParaRPr lang="en-CA"/>
+          </a:p>
+        </p:txBody>
       </p:sp>
       <p:sp>
         <p:nvSpPr>
@@ -6456,7 +6219,7 @@
           <a:bodyPr wrap="square" lIns="0" tIns="0" rIns="0" bIns="0" rtlCol="0" anchor="ctr"/>
           <a:lstStyle/>
           <a:p>
-            <a:pPr algn="ctr" indent="0" marL="0">
+            <a:pPr marL="0" indent="0" algn="ctr">
               <a:buNone/>
             </a:pPr>
             <a:r>
@@ -6495,7 +6258,7 @@
           <a:bodyPr wrap="square" lIns="0" tIns="0" rIns="0" bIns="0" rtlCol="0" anchor="ctr"/>
           <a:lstStyle/>
           <a:p>
-            <a:pPr algn="ctr" indent="0" marL="0">
+            <a:pPr marL="0" indent="0" algn="ctr">
               <a:buNone/>
             </a:pPr>
             <a:r>
@@ -6537,6 +6300,13 @@
             <a:prstDash val="solid"/>
           </a:ln>
         </p:spPr>
+        <p:txBody>
+          <a:bodyPr/>
+          <a:lstStyle/>
+          <a:p>
+            <a:endParaRPr lang="en-CA"/>
+          </a:p>
+        </p:txBody>
       </p:sp>
       <p:sp>
         <p:nvSpPr>
@@ -6559,7 +6329,7 @@
           <a:bodyPr wrap="square" lIns="0" tIns="0" rIns="0" bIns="0" rtlCol="0" anchor="ctr"/>
           <a:lstStyle/>
           <a:p>
-            <a:pPr algn="ctr" indent="0" marL="0">
+            <a:pPr marL="0" indent="0" algn="ctr">
               <a:buNone/>
             </a:pPr>
             <a:r>
@@ -6598,7 +6368,7 @@
           <a:bodyPr wrap="square" lIns="0" tIns="0" rIns="0" bIns="0" rtlCol="0" anchor="ctr"/>
           <a:lstStyle/>
           <a:p>
-            <a:pPr algn="ctr" indent="0" marL="0">
+            <a:pPr marL="0" indent="0" algn="ctr">
               <a:buNone/>
             </a:pPr>
             <a:r>
@@ -6640,6 +6410,13 @@
             <a:prstDash val="solid"/>
           </a:ln>
         </p:spPr>
+        <p:txBody>
+          <a:bodyPr/>
+          <a:lstStyle/>
+          <a:p>
+            <a:endParaRPr lang="en-CA"/>
+          </a:p>
+        </p:txBody>
       </p:sp>
       <p:sp>
         <p:nvSpPr>
@@ -6662,7 +6439,7 @@
           <a:bodyPr wrap="square" lIns="0" tIns="0" rIns="0" bIns="0" rtlCol="0" anchor="ctr"/>
           <a:lstStyle/>
           <a:p>
-            <a:pPr algn="ctr" indent="0" marL="0">
+            <a:pPr marL="0" indent="0" algn="ctr">
               <a:buNone/>
             </a:pPr>
             <a:r>
@@ -6701,7 +6478,7 @@
           <a:bodyPr wrap="square" lIns="0" tIns="0" rIns="0" bIns="0" rtlCol="0" anchor="ctr"/>
           <a:lstStyle/>
           <a:p>
-            <a:pPr algn="ctr" indent="0" marL="0">
+            <a:pPr marL="0" indent="0" algn="ctr">
               <a:buNone/>
             </a:pPr>
             <a:r>
@@ -6743,6 +6520,13 @@
             <a:prstDash val="solid"/>
           </a:ln>
         </p:spPr>
+        <p:txBody>
+          <a:bodyPr/>
+          <a:lstStyle/>
+          <a:p>
+            <a:endParaRPr lang="en-CA"/>
+          </a:p>
+        </p:txBody>
       </p:sp>
       <p:sp>
         <p:nvSpPr>
@@ -6765,7 +6549,7 @@
           <a:bodyPr wrap="square" lIns="0" tIns="0" rIns="0" bIns="0" rtlCol="0" anchor="ctr"/>
           <a:lstStyle/>
           <a:p>
-            <a:pPr algn="ctr" indent="0" marL="0">
+            <a:pPr marL="0" indent="0" algn="ctr">
               <a:buNone/>
             </a:pPr>
             <a:r>
@@ -6785,7 +6569,7 @@
       </p:sp>
       <p:graphicFrame>
         <p:nvGraphicFramePr>
-          <p:cNvPr id="4" name="Table 0"/>
+          <p:cNvPr id="3" name="Table 0"/>
           <p:cNvGraphicFramePr>
             <a:graphicFrameLocks noGrp="1"/>
           </p:cNvGraphicFramePr>
@@ -6799,16 +6583,34 @@
         </p:nvGraphicFramePr>
         <p:xfrm>
           <a:off x="457200" y="2377440"/>
-          <a:ext cx="8229600" cy="914400"/>
+          <a:ext cx="8229600" cy="1828800"/>
         </p:xfrm>
         <a:graphic>
           <a:graphicData uri="http://schemas.openxmlformats.org/drawingml/2006/table">
             <a:tbl>
               <a:tblPr/>
               <a:tblGrid>
-                <a:gridCol w="1645920"/>
-                <a:gridCol w="3108960"/>
-                <a:gridCol w="3474720"/>
+                <a:gridCol w="1645920">
+                  <a:extLst>
+                    <a:ext uri="{9D8B030D-6E8A-4147-A177-3AD203B41FA5}">
+                      <a16:colId xmlns:a16="http://schemas.microsoft.com/office/drawing/2014/main" val="20000"/>
+                    </a:ext>
+                  </a:extLst>
+                </a:gridCol>
+                <a:gridCol w="3108960">
+                  <a:extLst>
+                    <a:ext uri="{9D8B030D-6E8A-4147-A177-3AD203B41FA5}">
+                      <a16:colId xmlns:a16="http://schemas.microsoft.com/office/drawing/2014/main" val="20001"/>
+                    </a:ext>
+                  </a:extLst>
+                </a:gridCol>
+                <a:gridCol w="3474720">
+                  <a:extLst>
+                    <a:ext uri="{9D8B030D-6E8A-4147-A177-3AD203B41FA5}">
+                      <a16:colId xmlns:a16="http://schemas.microsoft.com/office/drawing/2014/main" val="20002"/>
+                    </a:ext>
+                  </a:extLst>
+                </a:gridCol>
               </a:tblGrid>
               <a:tr h="457200">
                 <a:tc>
@@ -6816,7 +6618,7 @@
                     <a:bodyPr/>
                     <a:lstStyle/>
                     <a:p>
-                      <a:pPr indent="0" marL="0">
+                      <a:pPr marL="0" indent="0">
                         <a:buNone/>
                       </a:pPr>
                       <a:r>
@@ -6837,7 +6639,7 @@
                       </a:endParaRPr>
                     </a:p>
                   </a:txBody>
-                  <a:tcPr marL="91440" marR="91440" marT="45720" marB="45720" anchor="ctr">
+                  <a:tcPr anchor="ctr">
                     <a:lnL w="9525" cap="flat" cmpd="sng" algn="ctr">
                       <a:solidFill>
                         <a:srgbClr val="CCCCCC"/>
@@ -6884,7 +6686,7 @@
                     <a:bodyPr/>
                     <a:lstStyle/>
                     <a:p>
-                      <a:pPr indent="0" marL="0">
+                      <a:pPr marL="0" indent="0">
                         <a:buNone/>
                       </a:pPr>
                       <a:r>
@@ -6905,7 +6707,7 @@
                       </a:endParaRPr>
                     </a:p>
                   </a:txBody>
-                  <a:tcPr marL="91440" marR="91440" marT="45720" marB="45720" anchor="ctr">
+                  <a:tcPr anchor="ctr">
                     <a:lnL w="9525" cap="flat" cmpd="sng" algn="ctr">
                       <a:solidFill>
                         <a:srgbClr val="CCCCCC"/>
@@ -6952,7 +6754,7 @@
                     <a:bodyPr/>
                     <a:lstStyle/>
                     <a:p>
-                      <a:pPr indent="0" marL="0">
+                      <a:pPr marL="0" indent="0">
                         <a:buNone/>
                       </a:pPr>
                       <a:r>
@@ -6973,7 +6775,7 @@
                       </a:endParaRPr>
                     </a:p>
                   </a:txBody>
-                  <a:tcPr marL="91440" marR="91440" marT="45720" marB="45720" anchor="ctr">
+                  <a:tcPr anchor="ctr">
                     <a:lnL w="9525" cap="flat" cmpd="sng" algn="ctr">
                       <a:solidFill>
                         <a:srgbClr val="CCCCCC"/>
@@ -7015,6 +6817,11 @@
                     </a:solidFill>
                   </a:tcPr>
                 </a:tc>
+                <a:extLst>
+                  <a:ext uri="{0D108BD9-81ED-4DB2-BD59-A6C34878D82A}">
+                    <a16:rowId xmlns:a16="http://schemas.microsoft.com/office/drawing/2014/main" val="10000"/>
+                  </a:ext>
+                </a:extLst>
               </a:tr>
               <a:tr h="457200">
                 <a:tc>
@@ -7022,7 +6829,7 @@
                     <a:bodyPr/>
                     <a:lstStyle/>
                     <a:p>
-                      <a:pPr indent="0" marL="0">
+                      <a:pPr marL="0" indent="0">
                         <a:buNone/>
                       </a:pPr>
                       <a:r>
@@ -7043,7 +6850,7 @@
                       </a:endParaRPr>
                     </a:p>
                   </a:txBody>
-                  <a:tcPr marL="91440" marR="91440" marT="45720" marB="45720" anchor="ctr">
+                  <a:tcPr anchor="ctr">
                     <a:lnL w="9525" cap="flat" cmpd="sng" algn="ctr">
                       <a:solidFill>
                         <a:srgbClr val="CCCCCC"/>
@@ -7087,7 +6894,7 @@
                     <a:bodyPr/>
                     <a:lstStyle/>
                     <a:p>
-                      <a:pPr indent="0" marL="0">
+                      <a:pPr marL="0" indent="0">
                         <a:buNone/>
                       </a:pPr>
                       <a:r>
@@ -7108,7 +6915,7 @@
                       </a:endParaRPr>
                     </a:p>
                   </a:txBody>
-                  <a:tcPr marL="91440" marR="91440" marT="45720" marB="45720" anchor="ctr">
+                  <a:tcPr anchor="ctr">
                     <a:lnL w="9525" cap="flat" cmpd="sng" algn="ctr">
                       <a:solidFill>
                         <a:srgbClr val="CCCCCC"/>
@@ -7152,7 +6959,7 @@
                     <a:bodyPr/>
                     <a:lstStyle/>
                     <a:p>
-                      <a:pPr indent="0" marL="0">
+                      <a:pPr marL="0" indent="0">
                         <a:buNone/>
                       </a:pPr>
                       <a:r>
@@ -7173,7 +6980,7 @@
                       </a:endParaRPr>
                     </a:p>
                   </a:txBody>
-                  <a:tcPr marL="91440" marR="91440" marT="45720" marB="45720" anchor="ctr">
+                  <a:tcPr anchor="ctr">
                     <a:lnL w="9525" cap="flat" cmpd="sng" algn="ctr">
                       <a:solidFill>
                         <a:srgbClr val="CCCCCC"/>
@@ -7212,6 +7019,11 @@
                     </a:lnB>
                   </a:tcPr>
                 </a:tc>
+                <a:extLst>
+                  <a:ext uri="{0D108BD9-81ED-4DB2-BD59-A6C34878D82A}">
+                    <a16:rowId xmlns:a16="http://schemas.microsoft.com/office/drawing/2014/main" val="10001"/>
+                  </a:ext>
+                </a:extLst>
               </a:tr>
               <a:tr h="457200">
                 <a:tc>
@@ -7219,7 +7031,7 @@
                     <a:bodyPr/>
                     <a:lstStyle/>
                     <a:p>
-                      <a:pPr indent="0" marL="0">
+                      <a:pPr marL="0" indent="0">
                         <a:buNone/>
                       </a:pPr>
                       <a:r>
@@ -7240,7 +7052,7 @@
                       </a:endParaRPr>
                     </a:p>
                   </a:txBody>
-                  <a:tcPr marL="91440" marR="91440" marT="45720" marB="45720" anchor="ctr">
+                  <a:tcPr anchor="ctr">
                     <a:lnL w="9525" cap="flat" cmpd="sng" algn="ctr">
                       <a:solidFill>
                         <a:srgbClr val="CCCCCC"/>
@@ -7284,7 +7096,7 @@
                     <a:bodyPr/>
                     <a:lstStyle/>
                     <a:p>
-                      <a:pPr indent="0" marL="0">
+                      <a:pPr marL="0" indent="0">
                         <a:buNone/>
                       </a:pPr>
                       <a:r>
@@ -7305,7 +7117,7 @@
                       </a:endParaRPr>
                     </a:p>
                   </a:txBody>
-                  <a:tcPr marL="91440" marR="91440" marT="45720" marB="45720" anchor="ctr">
+                  <a:tcPr anchor="ctr">
                     <a:lnL w="9525" cap="flat" cmpd="sng" algn="ctr">
                       <a:solidFill>
                         <a:srgbClr val="CCCCCC"/>
@@ -7349,7 +7161,7 @@
                     <a:bodyPr/>
                     <a:lstStyle/>
                     <a:p>
-                      <a:pPr indent="0" marL="0">
+                      <a:pPr marL="0" indent="0">
                         <a:buNone/>
                       </a:pPr>
                       <a:r>
@@ -7370,7 +7182,7 @@
                       </a:endParaRPr>
                     </a:p>
                   </a:txBody>
-                  <a:tcPr marL="91440" marR="91440" marT="45720" marB="45720" anchor="ctr">
+                  <a:tcPr anchor="ctr">
                     <a:lnL w="9525" cap="flat" cmpd="sng" algn="ctr">
                       <a:solidFill>
                         <a:srgbClr val="CCCCCC"/>
@@ -7409,6 +7221,11 @@
                     </a:lnB>
                   </a:tcPr>
                 </a:tc>
+                <a:extLst>
+                  <a:ext uri="{0D108BD9-81ED-4DB2-BD59-A6C34878D82A}">
+                    <a16:rowId xmlns:a16="http://schemas.microsoft.com/office/drawing/2014/main" val="10002"/>
+                  </a:ext>
+                </a:extLst>
               </a:tr>
               <a:tr h="457200">
                 <a:tc>
@@ -7416,7 +7233,7 @@
                     <a:bodyPr/>
                     <a:lstStyle/>
                     <a:p>
-                      <a:pPr indent="0" marL="0">
+                      <a:pPr marL="0" indent="0">
                         <a:buNone/>
                       </a:pPr>
                       <a:r>
@@ -7437,7 +7254,7 @@
                       </a:endParaRPr>
                     </a:p>
                   </a:txBody>
-                  <a:tcPr marL="91440" marR="91440" marT="45720" marB="45720" anchor="ctr">
+                  <a:tcPr anchor="ctr">
                     <a:lnL w="9525" cap="flat" cmpd="sng" algn="ctr">
                       <a:solidFill>
                         <a:srgbClr val="CCCCCC"/>
@@ -7481,7 +7298,7 @@
                     <a:bodyPr/>
                     <a:lstStyle/>
                     <a:p>
-                      <a:pPr indent="0" marL="0">
+                      <a:pPr marL="0" indent="0">
                         <a:buNone/>
                       </a:pPr>
                       <a:r>
@@ -7502,7 +7319,7 @@
                       </a:endParaRPr>
                     </a:p>
                   </a:txBody>
-                  <a:tcPr marL="91440" marR="91440" marT="45720" marB="45720" anchor="ctr">
+                  <a:tcPr anchor="ctr">
                     <a:lnL w="9525" cap="flat" cmpd="sng" algn="ctr">
                       <a:solidFill>
                         <a:srgbClr val="CCCCCC"/>
@@ -7546,7 +7363,7 @@
                     <a:bodyPr/>
                     <a:lstStyle/>
                     <a:p>
-                      <a:pPr indent="0" marL="0">
+                      <a:pPr marL="0" indent="0">
                         <a:buNone/>
                       </a:pPr>
                       <a:r>
@@ -7567,7 +7384,7 @@
                       </a:endParaRPr>
                     </a:p>
                   </a:txBody>
-                  <a:tcPr marL="91440" marR="91440" marT="45720" marB="45720" anchor="ctr">
+                  <a:tcPr anchor="ctr">
                     <a:lnL w="9525" cap="flat" cmpd="sng" algn="ctr">
                       <a:solidFill>
                         <a:srgbClr val="CCCCCC"/>
@@ -7606,6 +7423,11 @@
                     </a:lnB>
                   </a:tcPr>
                 </a:tc>
+                <a:extLst>
+                  <a:ext uri="{0D108BD9-81ED-4DB2-BD59-A6C34878D82A}">
+                    <a16:rowId xmlns:a16="http://schemas.microsoft.com/office/drawing/2014/main" val="10003"/>
+                  </a:ext>
+                </a:extLst>
               </a:tr>
             </a:tbl>
           </a:graphicData>
@@ -7632,7 +7454,7 @@
           <a:bodyPr wrap="square" lIns="0" tIns="0" rIns="0" bIns="0" rtlCol="0" anchor="ctr"/>
           <a:lstStyle/>
           <a:p>
-            <a:pPr indent="0" marL="0">
+            <a:pPr marL="0" indent="0">
               <a:buNone/>
             </a:pPr>
             <a:r>
@@ -7670,7 +7492,7 @@
           </a:prstGeom>
           <a:extLst>
             <a:ext uri="{C572A759-6A51-4108-AA02-DFA0A04FC94B}">
-              <ma14:wrappingTextBoxFlag xmlns:ma14="http://schemas.microsoft.com/office/mac/drawingml/2011/main" val="0"/>
+              <ma14:wrappingTextBoxFlag xmlns:ma14="http://schemas.microsoft.com/office/mac/drawingml/2011/main" xmlns="" val="0"/>
             </a:ext>
           </a:extLst>
         </p:spPr>
@@ -7691,7 +7513,7 @@
           <a:p>
             <a:pPr algn="l"/>
             <a:fld id="{F7021451-1387-4CA6-816F-3879F97B5CBC}" type="slidenum">
-              <a:rPr b="0" lang="en-US"/>
+              <a:rPr lang="en-US" b="0"/>
               <a:t>3</a:t>
             </a:fld>
             <a:endParaRPr lang="en-US"/>
@@ -7726,9 +7548,11 @@
       <p:sp>
         <p:nvSpPr>
           <p:cNvPr id="2" name="Text 0"/>
-          <p:cNvSpPr/>
+          <p:cNvSpPr>
+            <a:spLocks noGrp="1"/>
+          </p:cNvSpPr>
           <p:nvPr>
-            <p:ph idx="100" type="title" hasCustomPrompt="1"/>
+            <p:ph type="title" idx="100" hasCustomPrompt="1"/>
           </p:nvPr>
         </p:nvSpPr>
         <p:spPr>
@@ -7746,7 +7570,7 @@
           <a:bodyPr wrap="square" rtlCol="0" anchor="ctr"/>
           <a:lstStyle/>
           <a:p>
-            <a:pPr algn="ctr" indent="0" marL="0">
+            <a:pPr marL="0" indent="0" algn="ctr">
               <a:buNone/>
             </a:pPr>
             <a:r>
@@ -7788,6 +7612,13 @@
             <a:prstDash val="solid"/>
           </a:ln>
         </p:spPr>
+        <p:txBody>
+          <a:bodyPr/>
+          <a:lstStyle/>
+          <a:p>
+            <a:endParaRPr lang="en-CA"/>
+          </a:p>
+        </p:txBody>
       </p:sp>
       <p:sp>
         <p:nvSpPr>
@@ -7810,7 +7641,7 @@
           <a:bodyPr wrap="square" lIns="0" tIns="0" rIns="0" bIns="0" rtlCol="0" anchor="ctr"/>
           <a:lstStyle/>
           <a:p>
-            <a:pPr indent="0" marL="0">
+            <a:pPr marL="0" indent="0">
               <a:buNone/>
             </a:pPr>
             <a:r>
@@ -7849,7 +7680,7 @@
           <a:bodyPr wrap="square" lIns="0" tIns="0" rIns="0" bIns="0" rtlCol="0" anchor="ctr"/>
           <a:lstStyle/>
           <a:p>
-            <a:pPr indent="0" marL="0">
+            <a:pPr marL="0" indent="0">
               <a:buNone/>
             </a:pPr>
             <a:r>
@@ -7888,7 +7719,7 @@
           <a:bodyPr wrap="square" lIns="0" tIns="0" rIns="0" bIns="0" rtlCol="0" anchor="t"/>
           <a:lstStyle/>
           <a:p>
-            <a:pPr indent="0" marL="0">
+            <a:pPr marL="0" indent="0">
               <a:buNone/>
             </a:pPr>
             <a:r>
@@ -7927,7 +7758,7 @@
           <a:bodyPr wrap="square" lIns="0" tIns="0" rIns="0" bIns="0" rtlCol="0" anchor="t"/>
           <a:lstStyle/>
           <a:p>
-            <a:pPr indent="0" marL="0">
+            <a:pPr marL="0" indent="0">
               <a:buNone/>
             </a:pPr>
             <a:r>
@@ -7969,6 +7800,13 @@
             <a:prstDash val="solid"/>
           </a:ln>
         </p:spPr>
+        <p:txBody>
+          <a:bodyPr/>
+          <a:lstStyle/>
+          <a:p>
+            <a:endParaRPr lang="en-CA"/>
+          </a:p>
+        </p:txBody>
       </p:sp>
       <p:sp>
         <p:nvSpPr>
@@ -7991,7 +7829,7 @@
           <a:bodyPr wrap="square" lIns="0" tIns="0" rIns="0" bIns="0" rtlCol="0" anchor="ctr"/>
           <a:lstStyle/>
           <a:p>
-            <a:pPr indent="0" marL="0">
+            <a:pPr marL="0" indent="0">
               <a:buNone/>
             </a:pPr>
             <a:r>
@@ -8030,7 +7868,7 @@
           <a:bodyPr wrap="square" lIns="0" tIns="0" rIns="0" bIns="0" rtlCol="0" anchor="ctr"/>
           <a:lstStyle/>
           <a:p>
-            <a:pPr indent="0" marL="0">
+            <a:pPr marL="0" indent="0">
               <a:buNone/>
             </a:pPr>
             <a:r>
@@ -8069,7 +7907,7 @@
           <a:bodyPr wrap="square" lIns="0" tIns="0" rIns="0" bIns="0" rtlCol="0" anchor="t"/>
           <a:lstStyle/>
           <a:p>
-            <a:pPr indent="0" marL="0">
+            <a:pPr marL="0" indent="0">
               <a:buNone/>
             </a:pPr>
             <a:r>
@@ -8108,7 +7946,7 @@
           <a:bodyPr wrap="square" lIns="0" tIns="0" rIns="0" bIns="0" rtlCol="0" anchor="t"/>
           <a:lstStyle/>
           <a:p>
-            <a:pPr indent="0" marL="0">
+            <a:pPr marL="0" indent="0">
               <a:buNone/>
             </a:pPr>
             <a:r>
@@ -8150,6 +7988,13 @@
             <a:prstDash val="solid"/>
           </a:ln>
         </p:spPr>
+        <p:txBody>
+          <a:bodyPr/>
+          <a:lstStyle/>
+          <a:p>
+            <a:endParaRPr lang="en-CA"/>
+          </a:p>
+        </p:txBody>
       </p:sp>
       <p:sp>
         <p:nvSpPr>
@@ -8172,7 +8017,7 @@
           <a:bodyPr wrap="square" lIns="0" tIns="0" rIns="0" bIns="0" rtlCol="0" anchor="ctr"/>
           <a:lstStyle/>
           <a:p>
-            <a:pPr indent="0" marL="0">
+            <a:pPr marL="0" indent="0">
               <a:buNone/>
             </a:pPr>
             <a:r>
@@ -8211,7 +8056,7 @@
           <a:bodyPr wrap="square" lIns="0" tIns="0" rIns="0" bIns="0" rtlCol="0" anchor="ctr"/>
           <a:lstStyle/>
           <a:p>
-            <a:pPr indent="0" marL="0">
+            <a:pPr marL="0" indent="0">
               <a:buNone/>
             </a:pPr>
             <a:r>
@@ -8250,7 +8095,7 @@
           <a:bodyPr wrap="square" lIns="0" tIns="0" rIns="0" bIns="0" rtlCol="0" anchor="t"/>
           <a:lstStyle/>
           <a:p>
-            <a:pPr indent="0" marL="0">
+            <a:pPr marL="0" indent="0">
               <a:buNone/>
             </a:pPr>
             <a:r>
@@ -8289,7 +8134,7 @@
           <a:bodyPr wrap="square" lIns="0" tIns="0" rIns="0" bIns="0" rtlCol="0" anchor="t"/>
           <a:lstStyle/>
           <a:p>
-            <a:pPr indent="0" marL="0">
+            <a:pPr marL="0" indent="0">
               <a:buNone/>
             </a:pPr>
             <a:r>
@@ -8328,7 +8173,7 @@
           <a:bodyPr wrap="square" lIns="0" tIns="0" rIns="0" bIns="0" rtlCol="0" anchor="ctr"/>
           <a:lstStyle/>
           <a:p>
-            <a:pPr algn="ctr" indent="0" marL="0">
+            <a:pPr marL="0" indent="0" algn="ctr">
               <a:buNone/>
             </a:pPr>
             <a:r>
@@ -8366,7 +8211,7 @@
           </a:prstGeom>
           <a:extLst>
             <a:ext uri="{C572A759-6A51-4108-AA02-DFA0A04FC94B}">
-              <ma14:wrappingTextBoxFlag xmlns:ma14="http://schemas.microsoft.com/office/mac/drawingml/2011/main" val="0"/>
+              <ma14:wrappingTextBoxFlag xmlns:ma14="http://schemas.microsoft.com/office/mac/drawingml/2011/main" xmlns="" val="0"/>
             </a:ext>
           </a:extLst>
         </p:spPr>
@@ -8387,7 +8232,7 @@
           <a:p>
             <a:pPr algn="l"/>
             <a:fld id="{F7021451-1387-4CA6-816F-3879F97B5CBC}" type="slidenum">
-              <a:rPr b="0" lang="en-US"/>
+              <a:rPr lang="en-US" b="0"/>
               <a:t>4</a:t>
             </a:fld>
             <a:endParaRPr lang="en-US"/>
@@ -8422,9 +8267,11 @@
       <p:sp>
         <p:nvSpPr>
           <p:cNvPr id="2" name="Text 0"/>
-          <p:cNvSpPr/>
+          <p:cNvSpPr>
+            <a:spLocks noGrp="1"/>
+          </p:cNvSpPr>
           <p:nvPr>
-            <p:ph idx="100" type="title" hasCustomPrompt="1"/>
+            <p:ph type="title" idx="100" hasCustomPrompt="1"/>
           </p:nvPr>
         </p:nvSpPr>
         <p:spPr>
@@ -8442,7 +8289,7 @@
           <a:bodyPr wrap="square" rtlCol="0" anchor="ctr"/>
           <a:lstStyle/>
           <a:p>
-            <a:pPr algn="ctr" indent="0" marL="0">
+            <a:pPr marL="0" indent="0" algn="ctr">
               <a:buNone/>
             </a:pPr>
             <a:r>
@@ -8462,7 +8309,7 @@
       </p:sp>
       <p:graphicFrame>
         <p:nvGraphicFramePr>
-          <p:cNvPr id="4" name="Chart 0" descr=""/>
+          <p:cNvPr id="4" name="Chart 0"/>
           <p:cNvGraphicFramePr/>
           <p:nvPr/>
         </p:nvGraphicFramePr>
@@ -8470,9 +8317,9 @@
           <a:off x="365760" y="1051560"/>
           <a:ext cx="5669280" cy="3566160"/>
         </p:xfrm>
-        <a:graphic xmlns:a="http://schemas.openxmlformats.org/drawingml/2006/main">
+        <a:graphic>
           <a:graphicData uri="http://schemas.openxmlformats.org/drawingml/2006/chart">
-            <c:chart xmlns:c="http://schemas.openxmlformats.org/drawingml/2006/chart" r:id="rId1"/>
+            <c:chart xmlns:c="http://schemas.openxmlformats.org/drawingml/2006/chart" xmlns:r="http://schemas.openxmlformats.org/officeDocument/2006/relationships" r:id="rId3"/>
           </a:graphicData>
         </a:graphic>
       </p:graphicFrame>
@@ -8500,6 +8347,13 @@
             <a:prstDash val="solid"/>
           </a:ln>
         </p:spPr>
+        <p:txBody>
+          <a:bodyPr/>
+          <a:lstStyle/>
+          <a:p>
+            <a:endParaRPr lang="en-CA"/>
+          </a:p>
+        </p:txBody>
       </p:sp>
       <p:sp>
         <p:nvSpPr>
@@ -8522,7 +8376,7 @@
           <a:bodyPr wrap="square" lIns="0" tIns="0" rIns="0" bIns="0" rtlCol="0" anchor="ctr"/>
           <a:lstStyle/>
           <a:p>
-            <a:pPr algn="ctr" indent="0" marL="0">
+            <a:pPr marL="0" indent="0" algn="ctr">
               <a:buNone/>
             </a:pPr>
             <a:r>
@@ -8561,7 +8415,7 @@
           <a:bodyPr wrap="square" lIns="0" tIns="0" rIns="0" bIns="0" rtlCol="0" anchor="ctr"/>
           <a:lstStyle/>
           <a:p>
-            <a:pPr algn="ctr" indent="0" marL="0">
+            <a:pPr marL="0" indent="0" algn="ctr">
               <a:buNone/>
             </a:pPr>
             <a:r>
@@ -8578,7 +8432,7 @@
             <a:endParaRPr lang="en-US" sz="1300" dirty="0"/>
           </a:p>
           <a:p>
-            <a:pPr algn="ctr" indent="0" marL="0">
+            <a:pPr marL="0" indent="0" algn="ctr">
               <a:buNone/>
             </a:pPr>
             <a:r>
@@ -8620,6 +8474,13 @@
             <a:prstDash val="solid"/>
           </a:ln>
         </p:spPr>
+        <p:txBody>
+          <a:bodyPr/>
+          <a:lstStyle/>
+          <a:p>
+            <a:endParaRPr lang="en-CA"/>
+          </a:p>
+        </p:txBody>
       </p:sp>
       <p:sp>
         <p:nvSpPr>
@@ -8642,7 +8503,7 @@
           <a:bodyPr wrap="square" lIns="0" tIns="0" rIns="0" bIns="0" rtlCol="0" anchor="ctr"/>
           <a:lstStyle/>
           <a:p>
-            <a:pPr algn="ctr" indent="0" marL="0">
+            <a:pPr marL="0" indent="0" algn="ctr">
               <a:buNone/>
             </a:pPr>
             <a:r>
@@ -8681,7 +8542,7 @@
           <a:bodyPr wrap="square" lIns="0" tIns="0" rIns="0" bIns="0" rtlCol="0" anchor="ctr"/>
           <a:lstStyle/>
           <a:p>
-            <a:pPr algn="ctr" indent="0" marL="0">
+            <a:pPr marL="0" indent="0" algn="ctr">
               <a:buNone/>
             </a:pPr>
             <a:r>
@@ -8698,7 +8559,7 @@
             <a:endParaRPr lang="en-US" sz="1300" dirty="0"/>
           </a:p>
           <a:p>
-            <a:pPr algn="ctr" indent="0" marL="0">
+            <a:pPr marL="0" indent="0" algn="ctr">
               <a:buNone/>
             </a:pPr>
             <a:r>
@@ -8736,7 +8597,7 @@
           </a:prstGeom>
           <a:extLst>
             <a:ext uri="{C572A759-6A51-4108-AA02-DFA0A04FC94B}">
-              <ma14:wrappingTextBoxFlag xmlns:ma14="http://schemas.microsoft.com/office/mac/drawingml/2011/main" val="0"/>
+              <ma14:wrappingTextBoxFlag xmlns:ma14="http://schemas.microsoft.com/office/mac/drawingml/2011/main" xmlns="" val="0"/>
             </a:ext>
           </a:extLst>
         </p:spPr>
@@ -8757,7 +8618,7 @@
           <a:p>
             <a:pPr algn="l"/>
             <a:fld id="{F7021451-1387-4CA6-816F-3879F97B5CBC}" type="slidenum">
-              <a:rPr b="0" lang="en-US"/>
+              <a:rPr lang="en-US" b="0"/>
               <a:t>5</a:t>
             </a:fld>
             <a:endParaRPr lang="en-US"/>
@@ -8792,9 +8653,11 @@
       <p:sp>
         <p:nvSpPr>
           <p:cNvPr id="2" name="Text 0"/>
-          <p:cNvSpPr/>
+          <p:cNvSpPr>
+            <a:spLocks noGrp="1"/>
+          </p:cNvSpPr>
           <p:nvPr>
-            <p:ph idx="100" type="title" hasCustomPrompt="1"/>
+            <p:ph type="title" idx="100" hasCustomPrompt="1"/>
           </p:nvPr>
         </p:nvSpPr>
         <p:spPr>
@@ -8812,7 +8675,7 @@
           <a:bodyPr wrap="square" rtlCol="0" anchor="ctr"/>
           <a:lstStyle/>
           <a:p>
-            <a:pPr algn="ctr" indent="0" marL="0">
+            <a:pPr marL="0" indent="0" algn="ctr">
               <a:buNone/>
             </a:pPr>
             <a:r>
@@ -8832,7 +8695,7 @@
       </p:sp>
       <p:graphicFrame>
         <p:nvGraphicFramePr>
-          <p:cNvPr id="4" name="Chart 0" descr=""/>
+          <p:cNvPr id="4" name="Chart 0"/>
           <p:cNvGraphicFramePr/>
           <p:nvPr/>
         </p:nvGraphicFramePr>
@@ -8840,9 +8703,9 @@
           <a:off x="365760" y="1005840"/>
           <a:ext cx="8412480" cy="3154680"/>
         </p:xfrm>
-        <a:graphic xmlns:a="http://schemas.openxmlformats.org/drawingml/2006/main">
+        <a:graphic>
           <a:graphicData uri="http://schemas.openxmlformats.org/drawingml/2006/chart">
-            <c:chart xmlns:c="http://schemas.openxmlformats.org/drawingml/2006/chart" r:id="rId1"/>
+            <c:chart xmlns:c="http://schemas.openxmlformats.org/drawingml/2006/chart" xmlns:r="http://schemas.openxmlformats.org/officeDocument/2006/relationships" r:id="rId3"/>
           </a:graphicData>
         </a:graphic>
       </p:graphicFrame>
@@ -8867,7 +8730,7 @@
           <a:bodyPr wrap="square" lIns="0" tIns="0" rIns="0" bIns="0" rtlCol="0" anchor="ctr"/>
           <a:lstStyle/>
           <a:p>
-            <a:pPr algn="ctr" indent="0" marL="0">
+            <a:pPr marL="0" indent="0" algn="ctr">
               <a:buNone/>
             </a:pPr>
             <a:r>
@@ -8906,7 +8769,7 @@
           <a:bodyPr wrap="square" lIns="0" tIns="0" rIns="0" bIns="0" rtlCol="0" anchor="ctr"/>
           <a:lstStyle/>
           <a:p>
-            <a:pPr algn="ctr" indent="0" marL="0">
+            <a:pPr marL="0" indent="0" algn="ctr">
               <a:buNone/>
             </a:pPr>
             <a:r>
@@ -8944,7 +8807,7 @@
           </a:prstGeom>
           <a:extLst>
             <a:ext uri="{C572A759-6A51-4108-AA02-DFA0A04FC94B}">
-              <ma14:wrappingTextBoxFlag xmlns:ma14="http://schemas.microsoft.com/office/mac/drawingml/2011/main" val="0"/>
+              <ma14:wrappingTextBoxFlag xmlns:ma14="http://schemas.microsoft.com/office/mac/drawingml/2011/main" xmlns="" val="0"/>
             </a:ext>
           </a:extLst>
         </p:spPr>
@@ -8965,7 +8828,7 @@
           <a:p>
             <a:pPr algn="l"/>
             <a:fld id="{F7021451-1387-4CA6-816F-3879F97B5CBC}" type="slidenum">
-              <a:rPr b="0" lang="en-US"/>
+              <a:rPr lang="en-US" b="0"/>
               <a:t>6</a:t>
             </a:fld>
             <a:endParaRPr lang="en-US"/>
@@ -9000,9 +8863,11 @@
       <p:sp>
         <p:nvSpPr>
           <p:cNvPr id="2" name="Text 0"/>
-          <p:cNvSpPr/>
+          <p:cNvSpPr>
+            <a:spLocks noGrp="1"/>
+          </p:cNvSpPr>
           <p:nvPr>
-            <p:ph idx="100" type="title" hasCustomPrompt="1"/>
+            <p:ph type="title" idx="100" hasCustomPrompt="1"/>
           </p:nvPr>
         </p:nvSpPr>
         <p:spPr>
@@ -9020,7 +8885,7 @@
           <a:bodyPr wrap="square" rtlCol="0" anchor="ctr"/>
           <a:lstStyle/>
           <a:p>
-            <a:pPr algn="ctr" indent="0" marL="0">
+            <a:pPr marL="0" indent="0" algn="ctr">
               <a:buNone/>
             </a:pPr>
             <a:r>
@@ -9040,7 +8905,7 @@
       </p:sp>
       <p:graphicFrame>
         <p:nvGraphicFramePr>
-          <p:cNvPr id="4" name="Chart 0" descr=""/>
+          <p:cNvPr id="4" name="Chart 0"/>
           <p:cNvGraphicFramePr/>
           <p:nvPr/>
         </p:nvGraphicFramePr>
@@ -9048,9 +8913,9 @@
           <a:off x="365760" y="1051560"/>
           <a:ext cx="4937760" cy="3291840"/>
         </p:xfrm>
-        <a:graphic xmlns:a="http://schemas.openxmlformats.org/drawingml/2006/main">
+        <a:graphic>
           <a:graphicData uri="http://schemas.openxmlformats.org/drawingml/2006/chart">
-            <c:chart xmlns:c="http://schemas.openxmlformats.org/drawingml/2006/chart" r:id="rId1"/>
+            <c:chart xmlns:c="http://schemas.openxmlformats.org/drawingml/2006/chart" xmlns:r="http://schemas.openxmlformats.org/officeDocument/2006/relationships" r:id="rId3"/>
           </a:graphicData>
         </a:graphic>
       </p:graphicFrame>
@@ -9163,6 +9028,13 @@
             <a:prstDash val="solid"/>
           </a:ln>
         </p:spPr>
+        <p:txBody>
+          <a:bodyPr/>
+          <a:lstStyle/>
+          <a:p>
+            <a:endParaRPr lang="en-CA"/>
+          </a:p>
+        </p:txBody>
       </p:sp>
       <p:sp>
         <p:nvSpPr>
@@ -9185,7 +9057,7 @@
           <a:bodyPr wrap="square" lIns="0" tIns="0" rIns="0" bIns="0" rtlCol="0" anchor="ctr"/>
           <a:lstStyle/>
           <a:p>
-            <a:pPr algn="ctr" indent="0" marL="0">
+            <a:pPr marL="0" indent="0" algn="ctr">
               <a:buNone/>
             </a:pPr>
             <a:r>
@@ -9223,7 +9095,7 @@
           </a:prstGeom>
           <a:extLst>
             <a:ext uri="{C572A759-6A51-4108-AA02-DFA0A04FC94B}">
-              <ma14:wrappingTextBoxFlag xmlns:ma14="http://schemas.microsoft.com/office/mac/drawingml/2011/main" val="0"/>
+              <ma14:wrappingTextBoxFlag xmlns:ma14="http://schemas.microsoft.com/office/mac/drawingml/2011/main" xmlns="" val="0"/>
             </a:ext>
           </a:extLst>
         </p:spPr>
@@ -9244,7 +9116,7 @@
           <a:p>
             <a:pPr algn="l"/>
             <a:fld id="{F7021451-1387-4CA6-816F-3879F97B5CBC}" type="slidenum">
-              <a:rPr b="0" lang="en-US"/>
+              <a:rPr lang="en-US" b="0"/>
               <a:t>7</a:t>
             </a:fld>
             <a:endParaRPr lang="en-US"/>
@@ -9279,9 +9151,11 @@
       <p:sp>
         <p:nvSpPr>
           <p:cNvPr id="2" name="Text 0"/>
-          <p:cNvSpPr/>
+          <p:cNvSpPr>
+            <a:spLocks noGrp="1"/>
+          </p:cNvSpPr>
           <p:nvPr>
-            <p:ph idx="100" type="title" hasCustomPrompt="1"/>
+            <p:ph type="title" idx="100" hasCustomPrompt="1"/>
           </p:nvPr>
         </p:nvSpPr>
         <p:spPr>
@@ -9299,7 +9173,7 @@
           <a:bodyPr wrap="square" rtlCol="0" anchor="ctr"/>
           <a:lstStyle/>
           <a:p>
-            <a:pPr algn="ctr" indent="0" marL="0">
+            <a:pPr marL="0" indent="0" algn="ctr">
               <a:buNone/>
             </a:pPr>
             <a:r>
@@ -9319,7 +9193,7 @@
       </p:sp>
       <p:graphicFrame>
         <p:nvGraphicFramePr>
-          <p:cNvPr id="4" name="Chart 0" descr=""/>
+          <p:cNvPr id="4" name="Chart 0"/>
           <p:cNvGraphicFramePr/>
           <p:nvPr/>
         </p:nvGraphicFramePr>
@@ -9327,9 +9201,9 @@
           <a:off x="365760" y="1051560"/>
           <a:ext cx="5303520" cy="3383280"/>
         </p:xfrm>
-        <a:graphic xmlns:a="http://schemas.openxmlformats.org/drawingml/2006/main">
+        <a:graphic>
           <a:graphicData uri="http://schemas.openxmlformats.org/drawingml/2006/chart">
-            <c:chart xmlns:c="http://schemas.openxmlformats.org/drawingml/2006/chart" r:id="rId1"/>
+            <c:chart xmlns:c="http://schemas.openxmlformats.org/drawingml/2006/chart" xmlns:r="http://schemas.openxmlformats.org/officeDocument/2006/relationships" r:id="rId3"/>
           </a:graphicData>
         </a:graphic>
       </p:graphicFrame>
@@ -9459,7 +9333,7 @@
           </a:prstGeom>
           <a:extLst>
             <a:ext uri="{C572A759-6A51-4108-AA02-DFA0A04FC94B}">
-              <ma14:wrappingTextBoxFlag xmlns:ma14="http://schemas.microsoft.com/office/mac/drawingml/2011/main" val="0"/>
+              <ma14:wrappingTextBoxFlag xmlns:ma14="http://schemas.microsoft.com/office/mac/drawingml/2011/main" xmlns="" val="0"/>
             </a:ext>
           </a:extLst>
         </p:spPr>
@@ -9480,7 +9354,7 @@
           <a:p>
             <a:pPr algn="l"/>
             <a:fld id="{F7021451-1387-4CA6-816F-3879F97B5CBC}" type="slidenum">
-              <a:rPr b="0" lang="en-US"/>
+              <a:rPr lang="en-US" b="0"/>
               <a:t>8</a:t>
             </a:fld>
             <a:endParaRPr lang="en-US"/>
@@ -9515,9 +9389,11 @@
       <p:sp>
         <p:nvSpPr>
           <p:cNvPr id="2" name="Text 0"/>
-          <p:cNvSpPr/>
+          <p:cNvSpPr>
+            <a:spLocks noGrp="1"/>
+          </p:cNvSpPr>
           <p:nvPr>
-            <p:ph idx="100" type="title" hasCustomPrompt="1"/>
+            <p:ph type="title" idx="100" hasCustomPrompt="1"/>
           </p:nvPr>
         </p:nvSpPr>
         <p:spPr>
@@ -9535,7 +9411,7 @@
           <a:bodyPr wrap="square" rtlCol="0" anchor="ctr"/>
           <a:lstStyle/>
           <a:p>
-            <a:pPr algn="ctr" indent="0" marL="0">
+            <a:pPr marL="0" indent="0" algn="ctr">
               <a:buNone/>
             </a:pPr>
             <a:r>
@@ -9577,6 +9453,13 @@
             <a:prstDash val="solid"/>
           </a:ln>
         </p:spPr>
+        <p:txBody>
+          <a:bodyPr/>
+          <a:lstStyle/>
+          <a:p>
+            <a:endParaRPr lang="en-CA"/>
+          </a:p>
+        </p:txBody>
       </p:sp>
       <p:sp>
         <p:nvSpPr>
@@ -9599,7 +9482,7 @@
           <a:bodyPr wrap="square" lIns="0" tIns="0" rIns="0" bIns="0" rtlCol="0" anchor="ctr"/>
           <a:lstStyle/>
           <a:p>
-            <a:pPr algn="ctr" indent="0" marL="0">
+            <a:pPr marL="0" indent="0" algn="ctr">
               <a:buNone/>
             </a:pPr>
             <a:r>
@@ -9641,6 +9524,13 @@
             <a:prstDash val="solid"/>
           </a:ln>
         </p:spPr>
+        <p:txBody>
+          <a:bodyPr/>
+          <a:lstStyle/>
+          <a:p>
+            <a:endParaRPr lang="en-CA"/>
+          </a:p>
+        </p:txBody>
       </p:sp>
       <p:sp>
         <p:nvSpPr>
@@ -9663,7 +9553,7 @@
           <a:bodyPr wrap="square" lIns="0" tIns="0" rIns="0" bIns="0" rtlCol="0" anchor="ctr"/>
           <a:lstStyle/>
           <a:p>
-            <a:pPr algn="ctr" indent="0" marL="0">
+            <a:pPr marL="0" indent="0" algn="ctr">
               <a:buNone/>
             </a:pPr>
             <a:r>
@@ -9913,7 +9803,7 @@
           </a:prstGeom>
           <a:extLst>
             <a:ext uri="{C572A759-6A51-4108-AA02-DFA0A04FC94B}">
-              <ma14:wrappingTextBoxFlag xmlns:ma14="http://schemas.microsoft.com/office/mac/drawingml/2011/main" val="0"/>
+              <ma14:wrappingTextBoxFlag xmlns:ma14="http://schemas.microsoft.com/office/mac/drawingml/2011/main" xmlns="" val="0"/>
             </a:ext>
           </a:extLst>
         </p:spPr>
@@ -9934,7 +9824,7 @@
           <a:p>
             <a:pPr algn="l"/>
             <a:fld id="{F7021451-1387-4CA6-816F-3879F97B5CBC}" type="slidenum">
-              <a:rPr b="0" lang="en-US"/>
+              <a:rPr lang="en-US" b="0"/>
               <a:t>9</a:t>
             </a:fld>
             <a:endParaRPr lang="en-US"/>
@@ -10242,4 +10132,319 @@
     </a:ext>
   </a:extLst>
 </a:theme>
+</file>
+
+<file path=ppt/theme/theme2.xml><?xml version="1.0" encoding="utf-8"?>
+<a:theme xmlns:a="http://schemas.openxmlformats.org/drawingml/2006/main" name="Office Theme">
+  <a:themeElements>
+    <a:clrScheme name="Office">
+      <a:dk1>
+        <a:sysClr val="windowText" lastClr="000000"/>
+      </a:dk1>
+      <a:lt1>
+        <a:sysClr val="window" lastClr="FFFFFF"/>
+      </a:lt1>
+      <a:dk2>
+        <a:srgbClr val="0E2841"/>
+      </a:dk2>
+      <a:lt2>
+        <a:srgbClr val="E8E8E8"/>
+      </a:lt2>
+      <a:accent1>
+        <a:srgbClr val="156082"/>
+      </a:accent1>
+      <a:accent2>
+        <a:srgbClr val="E97132"/>
+      </a:accent2>
+      <a:accent3>
+        <a:srgbClr val="196B24"/>
+      </a:accent3>
+      <a:accent4>
+        <a:srgbClr val="0F9ED5"/>
+      </a:accent4>
+      <a:accent5>
+        <a:srgbClr val="A02B93"/>
+      </a:accent5>
+      <a:accent6>
+        <a:srgbClr val="4EA72E"/>
+      </a:accent6>
+      <a:hlink>
+        <a:srgbClr val="467886"/>
+      </a:hlink>
+      <a:folHlink>
+        <a:srgbClr val="96607D"/>
+      </a:folHlink>
+    </a:clrScheme>
+    <a:fontScheme name="Office">
+      <a:majorFont>
+        <a:latin typeface="Aptos Display" panose="02110004020202020204"/>
+        <a:ea typeface=""/>
+        <a:cs typeface=""/>
+        <a:font script="Jpan" typeface="游ゴシック Light"/>
+        <a:font script="Hang" typeface="맑은 고딕"/>
+        <a:font script="Hans" typeface="等线 Light"/>
+        <a:font script="Hant" typeface="新細明體"/>
+        <a:font script="Arab" typeface="Times New Roman"/>
+        <a:font script="Hebr" typeface="Times New Roman"/>
+        <a:font script="Thai" typeface="Angsana New"/>
+        <a:font script="Ethi" typeface="Nyala"/>
+        <a:font script="Beng" typeface="Vrinda"/>
+        <a:font script="Gujr" typeface="Shruti"/>
+        <a:font script="Khmr" typeface="MoolBoran"/>
+        <a:font script="Knda" typeface="Tunga"/>
+        <a:font script="Guru" typeface="Raavi"/>
+        <a:font script="Cans" typeface="Euphemia"/>
+        <a:font script="Cher" typeface="Plantagenet Cherokee"/>
+        <a:font script="Yiii" typeface="Microsoft Yi Baiti"/>
+        <a:font script="Tibt" typeface="Microsoft Himalaya"/>
+        <a:font script="Thaa" typeface="MV Boli"/>
+        <a:font script="Deva" typeface="Mangal"/>
+        <a:font script="Telu" typeface="Gautami"/>
+        <a:font script="Taml" typeface="Latha"/>
+        <a:font script="Syrc" typeface="Estrangelo Edessa"/>
+        <a:font script="Orya" typeface="Kalinga"/>
+        <a:font script="Mlym" typeface="Kartika"/>
+        <a:font script="Laoo" typeface="DokChampa"/>
+        <a:font script="Sinh" typeface="Iskoola Pota"/>
+        <a:font script="Mong" typeface="Mongolian Baiti"/>
+        <a:font script="Viet" typeface="Times New Roman"/>
+        <a:font script="Uigh" typeface="Microsoft Uighur"/>
+        <a:font script="Geor" typeface="Sylfaen"/>
+        <a:font script="Armn" typeface="Arial"/>
+        <a:font script="Bugi" typeface="Leelawadee UI"/>
+        <a:font script="Bopo" typeface="Microsoft JhengHei"/>
+        <a:font script="Java" typeface="Javanese Text"/>
+        <a:font script="Lisu" typeface="Segoe UI"/>
+        <a:font script="Mymr" typeface="Myanmar Text"/>
+        <a:font script="Nkoo" typeface="Ebrima"/>
+        <a:font script="Olck" typeface="Nirmala UI"/>
+        <a:font script="Osma" typeface="Ebrima"/>
+        <a:font script="Phag" typeface="Phagspa"/>
+        <a:font script="Syrn" typeface="Estrangelo Edessa"/>
+        <a:font script="Syrj" typeface="Estrangelo Edessa"/>
+        <a:font script="Syre" typeface="Estrangelo Edessa"/>
+        <a:font script="Sora" typeface="Nirmala UI"/>
+        <a:font script="Tale" typeface="Microsoft Tai Le"/>
+        <a:font script="Talu" typeface="Microsoft New Tai Lue"/>
+        <a:font script="Tfng" typeface="Ebrima"/>
+      </a:majorFont>
+      <a:minorFont>
+        <a:latin typeface="Aptos" panose="02110004020202020204"/>
+        <a:ea typeface=""/>
+        <a:cs typeface=""/>
+        <a:font script="Jpan" typeface="游ゴシック"/>
+        <a:font script="Hang" typeface="맑은 고딕"/>
+        <a:font script="Hans" typeface="等线"/>
+        <a:font script="Hant" typeface="新細明體"/>
+        <a:font script="Arab" typeface="Arial"/>
+        <a:font script="Hebr" typeface="Arial"/>
+        <a:font script="Thai" typeface="Cordia New"/>
+        <a:font script="Ethi" typeface="Nyala"/>
+        <a:font script="Beng" typeface="Vrinda"/>
+        <a:font script="Gujr" typeface="Shruti"/>
+        <a:font script="Khmr" typeface="DaunPenh"/>
+        <a:font script="Knda" typeface="Tunga"/>
+        <a:font script="Guru" typeface="Raavi"/>
+        <a:font script="Cans" typeface="Euphemia"/>
+        <a:font script="Cher" typeface="Plantagenet Cherokee"/>
+        <a:font script="Yiii" typeface="Microsoft Yi Baiti"/>
+        <a:font script="Tibt" typeface="Microsoft Himalaya"/>
+        <a:font script="Thaa" typeface="MV Boli"/>
+        <a:font script="Deva" typeface="Mangal"/>
+        <a:font script="Telu" typeface="Gautami"/>
+        <a:font script="Taml" typeface="Latha"/>
+        <a:font script="Syrc" typeface="Estrangelo Edessa"/>
+        <a:font script="Orya" typeface="Kalinga"/>
+        <a:font script="Mlym" typeface="Kartika"/>
+        <a:font script="Laoo" typeface="DokChampa"/>
+        <a:font script="Sinh" typeface="Iskoola Pota"/>
+        <a:font script="Mong" typeface="Mongolian Baiti"/>
+        <a:font script="Viet" typeface="Arial"/>
+        <a:font script="Uigh" typeface="Microsoft Uighur"/>
+        <a:font script="Geor" typeface="Sylfaen"/>
+        <a:font script="Armn" typeface="Arial"/>
+        <a:font script="Bugi" typeface="Leelawadee UI"/>
+        <a:font script="Bopo" typeface="Microsoft JhengHei"/>
+        <a:font script="Java" typeface="Javanese Text"/>
+        <a:font script="Lisu" typeface="Segoe UI"/>
+        <a:font script="Mymr" typeface="Myanmar Text"/>
+        <a:font script="Nkoo" typeface="Ebrima"/>
+        <a:font script="Olck" typeface="Nirmala UI"/>
+        <a:font script="Osma" typeface="Ebrima"/>
+        <a:font script="Phag" typeface="Phagspa"/>
+        <a:font script="Syrn" typeface="Estrangelo Edessa"/>
+        <a:font script="Syrj" typeface="Estrangelo Edessa"/>
+        <a:font script="Syre" typeface="Estrangelo Edessa"/>
+        <a:font script="Sora" typeface="Nirmala UI"/>
+        <a:font script="Tale" typeface="Microsoft Tai Le"/>
+        <a:font script="Talu" typeface="Microsoft New Tai Lue"/>
+        <a:font script="Tfng" typeface="Ebrima"/>
+      </a:minorFont>
+    </a:fontScheme>
+    <a:fmtScheme name="Office">
+      <a:fillStyleLst>
+        <a:solidFill>
+          <a:schemeClr val="phClr"/>
+        </a:solidFill>
+        <a:gradFill rotWithShape="1">
+          <a:gsLst>
+            <a:gs pos="0">
+              <a:schemeClr val="phClr">
+                <a:lumMod val="110000"/>
+                <a:satMod val="105000"/>
+                <a:tint val="67000"/>
+              </a:schemeClr>
+            </a:gs>
+            <a:gs pos="50000">
+              <a:schemeClr val="phClr">
+                <a:lumMod val="105000"/>
+                <a:satMod val="103000"/>
+                <a:tint val="73000"/>
+              </a:schemeClr>
+            </a:gs>
+            <a:gs pos="100000">
+              <a:schemeClr val="phClr">
+                <a:lumMod val="105000"/>
+                <a:satMod val="109000"/>
+                <a:tint val="81000"/>
+              </a:schemeClr>
+            </a:gs>
+          </a:gsLst>
+          <a:lin ang="5400000" scaled="0"/>
+        </a:gradFill>
+        <a:gradFill rotWithShape="1">
+          <a:gsLst>
+            <a:gs pos="0">
+              <a:schemeClr val="phClr">
+                <a:satMod val="103000"/>
+                <a:lumMod val="102000"/>
+                <a:tint val="94000"/>
+              </a:schemeClr>
+            </a:gs>
+            <a:gs pos="50000">
+              <a:schemeClr val="phClr">
+                <a:satMod val="110000"/>
+                <a:lumMod val="100000"/>
+                <a:shade val="100000"/>
+              </a:schemeClr>
+            </a:gs>
+            <a:gs pos="100000">
+              <a:schemeClr val="phClr">
+                <a:lumMod val="99000"/>
+                <a:satMod val="120000"/>
+                <a:shade val="78000"/>
+              </a:schemeClr>
+            </a:gs>
+          </a:gsLst>
+          <a:lin ang="5400000" scaled="0"/>
+        </a:gradFill>
+      </a:fillStyleLst>
+      <a:lnStyleLst>
+        <a:ln w="12700" cap="flat" cmpd="sng" algn="ctr">
+          <a:solidFill>
+            <a:schemeClr val="phClr"/>
+          </a:solidFill>
+          <a:prstDash val="solid"/>
+          <a:miter lim="800000"/>
+        </a:ln>
+        <a:ln w="19050" cap="flat" cmpd="sng" algn="ctr">
+          <a:solidFill>
+            <a:schemeClr val="phClr"/>
+          </a:solidFill>
+          <a:prstDash val="solid"/>
+          <a:miter lim="800000"/>
+        </a:ln>
+        <a:ln w="25400" cap="flat" cmpd="sng" algn="ctr">
+          <a:solidFill>
+            <a:schemeClr val="phClr"/>
+          </a:solidFill>
+          <a:prstDash val="solid"/>
+          <a:miter lim="800000"/>
+        </a:ln>
+      </a:lnStyleLst>
+      <a:effectStyleLst>
+        <a:effectStyle>
+          <a:effectLst/>
+        </a:effectStyle>
+        <a:effectStyle>
+          <a:effectLst/>
+        </a:effectStyle>
+        <a:effectStyle>
+          <a:effectLst>
+            <a:outerShdw blurRad="57150" dist="19050" dir="5400000" algn="ctr" rotWithShape="0">
+              <a:srgbClr val="000000">
+                <a:alpha val="63000"/>
+              </a:srgbClr>
+            </a:outerShdw>
+          </a:effectLst>
+        </a:effectStyle>
+      </a:effectStyleLst>
+      <a:bgFillStyleLst>
+        <a:solidFill>
+          <a:schemeClr val="phClr"/>
+        </a:solidFill>
+        <a:solidFill>
+          <a:schemeClr val="phClr">
+            <a:tint val="95000"/>
+            <a:satMod val="170000"/>
+          </a:schemeClr>
+        </a:solidFill>
+        <a:gradFill rotWithShape="1">
+          <a:gsLst>
+            <a:gs pos="0">
+              <a:schemeClr val="phClr">
+                <a:tint val="93000"/>
+                <a:satMod val="150000"/>
+                <a:shade val="98000"/>
+                <a:lumMod val="102000"/>
+              </a:schemeClr>
+            </a:gs>
+            <a:gs pos="50000">
+              <a:schemeClr val="phClr">
+                <a:tint val="98000"/>
+                <a:satMod val="130000"/>
+                <a:shade val="90000"/>
+                <a:lumMod val="103000"/>
+              </a:schemeClr>
+            </a:gs>
+            <a:gs pos="100000">
+              <a:schemeClr val="phClr">
+                <a:shade val="63000"/>
+                <a:satMod val="120000"/>
+              </a:schemeClr>
+            </a:gs>
+          </a:gsLst>
+          <a:lin ang="5400000" scaled="0"/>
+        </a:gradFill>
+      </a:bgFillStyleLst>
+    </a:fmtScheme>
+  </a:themeElements>
+  <a:objectDefaults>
+    <a:lnDef>
+      <a:spPr/>
+      <a:bodyPr/>
+      <a:lstStyle/>
+      <a:style>
+        <a:lnRef idx="2">
+          <a:schemeClr val="accent1"/>
+        </a:lnRef>
+        <a:fillRef idx="0">
+          <a:schemeClr val="accent1"/>
+        </a:fillRef>
+        <a:effectRef idx="1">
+          <a:schemeClr val="accent1"/>
+        </a:effectRef>
+        <a:fontRef idx="minor">
+          <a:schemeClr val="tx1"/>
+        </a:fontRef>
+      </a:style>
+    </a:lnDef>
+  </a:objectDefaults>
+  <a:extraClrSchemeLst/>
+  <a:extLst>
+    <a:ext uri="{05A4C25C-085E-4340-85A3-A5531E510DB2}">
+      <thm15:themeFamily xmlns:thm15="http://schemas.microsoft.com/office/thememl/2012/main" name="Office Theme" id="{2E142A2C-CD16-42D6-873A-C26D2A0506FA}" vid="{1BDDFF52-6CD6-40A5-AB3C-68EB2F1E4D0A}"/>
+    </a:ext>
+  </a:extLst>
+</a:theme>
 </file>